--- a/output/wordlabs-re-prefix-3day.pptx
+++ b/output/wordlabs-re-prefix-3day.pptx
@@ -6040,7 +6040,7 @@
                 <a:ea typeface="Calibri" pitchFamily="34" charset="-122"/>
                 <a:cs typeface="Calibri" pitchFamily="34" charset="-120"/>
               </a:rPr>
-              <a:t>Mia decided to </a:t>
+              <a:t>The students decided to </a:t>
             </a:r>
             <a:pPr algn="l" indent="0" marL="0">
               <a:buNone/>
@@ -6057,7 +6057,7 @@
                 <a:ea typeface="Calibri" pitchFamily="34" charset="-122"/>
                 <a:cs typeface="Calibri" pitchFamily="34" charset="-120"/>
               </a:rPr>
-              <a:t>reconnect</a:t>
+              <a:t>recycle</a:t>
             </a:r>
             <a:pPr algn="l" indent="0" marL="0">
               <a:buNone/>
@@ -6071,7 +6071,7 @@
                 <a:ea typeface="Calibri" pitchFamily="34" charset="-122"/>
                 <a:cs typeface="Calibri" pitchFamily="34" charset="-120"/>
               </a:rPr>
-              <a:t> the cables and </a:t>
+              <a:t> the old newspapers and </a:t>
             </a:r>
             <a:pPr algn="l" indent="0" marL="0">
               <a:buNone/>
@@ -6088,7 +6088,7 @@
                 <a:ea typeface="Calibri" pitchFamily="34" charset="-122"/>
                 <a:cs typeface="Calibri" pitchFamily="34" charset="-120"/>
               </a:rPr>
-              <a:t>restart</a:t>
+              <a:t>replace</a:t>
             </a:r>
             <a:pPr algn="l" indent="0" marL="0">
               <a:buNone/>
@@ -6102,7 +6102,7 @@
                 <a:ea typeface="Calibri" pitchFamily="34" charset="-122"/>
                 <a:cs typeface="Calibri" pitchFamily="34" charset="-120"/>
               </a:rPr>
-              <a:t> the computer.</a:t>
+              <a:t> the worn-out covers on their books.</a:t>
             </a:r>
             <a:endParaRPr lang="en-US" sz="1800" dirty="0"/>
           </a:p>
@@ -6257,7 +6257,7 @@
                 <a:ea typeface="Trebuchet MS" pitchFamily="34" charset="-122"/>
                 <a:cs typeface="Trebuchet MS" pitchFamily="34" charset="-120"/>
               </a:rPr>
-              <a:t>reconnect</a:t>
+              <a:t>recycle</a:t>
             </a:r>
             <a:endParaRPr lang="en-US" sz="1400" dirty="0"/>
           </a:p>
@@ -6385,7 +6385,7 @@
                 <a:ea typeface="Trebuchet MS" pitchFamily="34" charset="-122"/>
                 <a:cs typeface="Trebuchet MS" pitchFamily="34" charset="-120"/>
               </a:rPr>
-              <a:t>restart</a:t>
+              <a:t>replace</a:t>
             </a:r>
             <a:endParaRPr lang="en-US" sz="1400" dirty="0"/>
           </a:p>
@@ -6855,7 +6855,7 @@
                 <a:ea typeface="Trebuchet MS" pitchFamily="34" charset="-122"/>
                 <a:cs typeface="Trebuchet MS" pitchFamily="34" charset="-120"/>
               </a:rPr>
-              <a:t>reconnect</a:t>
+              <a:t>recycle</a:t>
             </a:r>
             <a:endParaRPr lang="en-US" sz="2800" dirty="0"/>
           </a:p>
@@ -7682,7 +7682,7 @@
                 <a:ea typeface="Trebuchet MS" pitchFamily="34" charset="-122"/>
                 <a:cs typeface="Trebuchet MS" pitchFamily="34" charset="-120"/>
               </a:rPr>
-              <a:t>reconnect</a:t>
+              <a:t>recycle</a:t>
             </a:r>
             <a:endParaRPr lang="en-US" sz="2800" dirty="0"/>
           </a:p>
@@ -7933,7 +7933,7 @@
                 <a:ea typeface="Trebuchet MS" pitchFamily="34" charset="-122"/>
                 <a:cs typeface="Trebuchet MS" pitchFamily="34" charset="-120"/>
               </a:rPr>
-              <a:t>connect</a:t>
+              <a:t>cycle</a:t>
             </a:r>
             <a:endParaRPr lang="en-US" sz="1300" dirty="0"/>
           </a:p>
@@ -7972,7 +7972,7 @@
                 <a:ea typeface="Calibri" pitchFamily="34" charset="-122"/>
                 <a:cs typeface="Calibri" pitchFamily="34" charset="-120"/>
               </a:rPr>
-              <a:t>to join or link together</a:t>
+              <a:t>circle, wheel</a:t>
             </a:r>
             <a:endParaRPr lang="en-US" sz="850" dirty="0"/>
           </a:p>
@@ -8667,7 +8667,7 @@
                 <a:ea typeface="Trebuchet MS" pitchFamily="34" charset="-122"/>
                 <a:cs typeface="Trebuchet MS" pitchFamily="34" charset="-120"/>
               </a:rPr>
-              <a:t>reconnect</a:t>
+              <a:t>recycle</a:t>
             </a:r>
             <a:endParaRPr lang="en-US" sz="2800" dirty="0"/>
           </a:p>
@@ -8918,7 +8918,7 @@
                 <a:ea typeface="Trebuchet MS" pitchFamily="34" charset="-122"/>
                 <a:cs typeface="Trebuchet MS" pitchFamily="34" charset="-120"/>
               </a:rPr>
-              <a:t>connect</a:t>
+              <a:t>cycle</a:t>
             </a:r>
             <a:endParaRPr lang="en-US" sz="1300" dirty="0"/>
           </a:p>
@@ -8957,7 +8957,7 @@
                 <a:ea typeface="Calibri" pitchFamily="34" charset="-122"/>
                 <a:cs typeface="Calibri" pitchFamily="34" charset="-120"/>
               </a:rPr>
-              <a:t>to join or link together</a:t>
+              <a:t>circle, wheel</a:t>
             </a:r>
             <a:endParaRPr lang="en-US" sz="850" dirty="0"/>
           </a:p>
@@ -9221,7 +9221,7 @@
                 <a:ea typeface="Trebuchet MS" pitchFamily="34" charset="-122"/>
                 <a:cs typeface="Trebuchet MS" pitchFamily="34" charset="-120"/>
               </a:rPr>
-              <a:t>con</a:t>
+              <a:t>cy</a:t>
             </a:r>
             <a:endParaRPr lang="en-US" sz="1400" dirty="0"/>
           </a:p>
@@ -9326,7 +9326,7 @@
                 <a:ea typeface="Trebuchet MS" pitchFamily="34" charset="-122"/>
                 <a:cs typeface="Trebuchet MS" pitchFamily="34" charset="-120"/>
               </a:rPr>
-              <a:t>nect</a:t>
+              <a:t>cle</a:t>
             </a:r>
             <a:endParaRPr lang="en-US" sz="1400" dirty="0"/>
           </a:p>
@@ -9889,7 +9889,7 @@
                 <a:ea typeface="Trebuchet MS" pitchFamily="34" charset="-122"/>
                 <a:cs typeface="Trebuchet MS" pitchFamily="34" charset="-120"/>
               </a:rPr>
-              <a:t>reconnect</a:t>
+              <a:t>recycle</a:t>
             </a:r>
             <a:endParaRPr lang="en-US" sz="2800" dirty="0"/>
           </a:p>
@@ -10140,7 +10140,7 @@
                 <a:ea typeface="Trebuchet MS" pitchFamily="34" charset="-122"/>
                 <a:cs typeface="Trebuchet MS" pitchFamily="34" charset="-120"/>
               </a:rPr>
-              <a:t>connect</a:t>
+              <a:t>cycle</a:t>
             </a:r>
             <a:endParaRPr lang="en-US" sz="1300" dirty="0"/>
           </a:p>
@@ -10179,7 +10179,7 @@
                 <a:ea typeface="Calibri" pitchFamily="34" charset="-122"/>
                 <a:cs typeface="Calibri" pitchFamily="34" charset="-120"/>
               </a:rPr>
-              <a:t>to join or link together</a:t>
+              <a:t>circle, wheel</a:t>
             </a:r>
             <a:endParaRPr lang="en-US" sz="850" dirty="0"/>
           </a:p>
@@ -10443,7 +10443,7 @@
                 <a:ea typeface="Trebuchet MS" pitchFamily="34" charset="-122"/>
                 <a:cs typeface="Trebuchet MS" pitchFamily="34" charset="-120"/>
               </a:rPr>
-              <a:t>con</a:t>
+              <a:t>cy</a:t>
             </a:r>
             <a:endParaRPr lang="en-US" sz="1400" dirty="0"/>
           </a:p>
@@ -10548,7 +10548,7 @@
                 <a:ea typeface="Trebuchet MS" pitchFamily="34" charset="-122"/>
                 <a:cs typeface="Trebuchet MS" pitchFamily="34" charset="-120"/>
               </a:rPr>
-              <a:t>nect</a:t>
+              <a:t>cle</a:t>
             </a:r>
             <a:endParaRPr lang="en-US" sz="1400" dirty="0"/>
           </a:p>
@@ -10655,7 +10655,7 @@
         </p:nvSpPr>
         <p:spPr>
           <a:xfrm>
-            <a:off x="2023872" y="4169664"/>
+            <a:off x="2254649" y="4169664"/>
             <a:ext cx="685800" cy="384048"/>
           </a:xfrm>
           <a:prstGeom prst="rect">
@@ -10682,7 +10682,7 @@
         </p:nvSpPr>
         <p:spPr>
           <a:xfrm>
-            <a:off x="2023872" y="4169664"/>
+            <a:off x="2254649" y="4169664"/>
             <a:ext cx="685800" cy="384048"/>
           </a:xfrm>
           <a:prstGeom prst="rect">
@@ -10721,7 +10721,7 @@
         </p:nvSpPr>
         <p:spPr>
           <a:xfrm>
-            <a:off x="2831592" y="4169664"/>
+            <a:off x="3293146" y="4169664"/>
             <a:ext cx="685800" cy="384048"/>
           </a:xfrm>
           <a:prstGeom prst="rect">
@@ -10748,7 +10748,7 @@
         </p:nvSpPr>
         <p:spPr>
           <a:xfrm>
-            <a:off x="2831592" y="4169664"/>
+            <a:off x="3293146" y="4169664"/>
             <a:ext cx="685800" cy="384048"/>
           </a:xfrm>
           <a:prstGeom prst="rect">
@@ -10787,7 +10787,7 @@
         </p:nvSpPr>
         <p:spPr>
           <a:xfrm>
-            <a:off x="3639312" y="4169664"/>
+            <a:off x="4331643" y="4169664"/>
             <a:ext cx="685800" cy="384048"/>
           </a:xfrm>
           <a:prstGeom prst="rect">
@@ -10814,7 +10814,7 @@
         </p:nvSpPr>
         <p:spPr>
           <a:xfrm>
-            <a:off x="3639312" y="4169664"/>
+            <a:off x="4331643" y="4169664"/>
             <a:ext cx="685800" cy="384048"/>
           </a:xfrm>
           <a:prstGeom prst="rect">
@@ -10853,7 +10853,7 @@
         </p:nvSpPr>
         <p:spPr>
           <a:xfrm>
-            <a:off x="3639312" y="4572000"/>
+            <a:off x="4331643" y="4572000"/>
             <a:ext cx="685800" cy="219456"/>
           </a:xfrm>
           <a:prstGeom prst="rect">
@@ -10878,7 +10878,7 @@
                 <a:ea typeface="Calibri" pitchFamily="34" charset="-122"/>
                 <a:cs typeface="Calibri" pitchFamily="34" charset="-120"/>
               </a:rPr>
-              <a:t>/k/</a:t>
+              <a:t>/s/</a:t>
             </a:r>
             <a:endParaRPr lang="en-US" sz="750" dirty="0"/>
           </a:p>
@@ -10892,7 +10892,7 @@
         </p:nvSpPr>
         <p:spPr>
           <a:xfrm>
-            <a:off x="4447032" y="4169664"/>
+            <a:off x="5370141" y="4169664"/>
             <a:ext cx="685800" cy="384048"/>
           </a:xfrm>
           <a:prstGeom prst="rect">
@@ -10919,7 +10919,7 @@
         </p:nvSpPr>
         <p:spPr>
           <a:xfrm>
-            <a:off x="4447032" y="4169664"/>
+            <a:off x="5370141" y="4169664"/>
             <a:ext cx="685800" cy="384048"/>
           </a:xfrm>
           <a:prstGeom prst="rect">
@@ -10944,7 +10944,7 @@
                 <a:ea typeface="Trebuchet MS" pitchFamily="34" charset="-122"/>
                 <a:cs typeface="Trebuchet MS" pitchFamily="34" charset="-120"/>
               </a:rPr>
-              <a:t>o</a:t>
+              <a:t>y</a:t>
             </a:r>
             <a:endParaRPr lang="en-US" sz="900" dirty="0"/>
           </a:p>
@@ -10958,7 +10958,7 @@
         </p:nvSpPr>
         <p:spPr>
           <a:xfrm>
-            <a:off x="5254752" y="4169664"/>
+            <a:off x="6408638" y="4169664"/>
             <a:ext cx="685800" cy="384048"/>
           </a:xfrm>
           <a:prstGeom prst="rect">
@@ -10985,7 +10985,7 @@
         </p:nvSpPr>
         <p:spPr>
           <a:xfrm>
-            <a:off x="5254752" y="4169664"/>
+            <a:off x="6408638" y="4169664"/>
             <a:ext cx="685800" cy="384048"/>
           </a:xfrm>
           <a:prstGeom prst="rect">
@@ -11010,7 +11010,7 @@
                 <a:ea typeface="Trebuchet MS" pitchFamily="34" charset="-122"/>
                 <a:cs typeface="Trebuchet MS" pitchFamily="34" charset="-120"/>
               </a:rPr>
-              <a:t>nn</a:t>
+              <a:t>c</a:t>
             </a:r>
             <a:endParaRPr lang="en-US" sz="900" dirty="0"/>
           </a:p>
@@ -11024,7 +11024,7 @@
         </p:nvSpPr>
         <p:spPr>
           <a:xfrm>
-            <a:off x="6062472" y="4169664"/>
+            <a:off x="7447135" y="4169664"/>
             <a:ext cx="685800" cy="384048"/>
           </a:xfrm>
           <a:prstGeom prst="rect">
@@ -11051,7 +11051,7 @@
         </p:nvSpPr>
         <p:spPr>
           <a:xfrm>
-            <a:off x="6062472" y="4169664"/>
+            <a:off x="7447135" y="4169664"/>
             <a:ext cx="685800" cy="384048"/>
           </a:xfrm>
           <a:prstGeom prst="rect">
@@ -11076,178 +11076,7 @@
                 <a:ea typeface="Trebuchet MS" pitchFamily="34" charset="-122"/>
                 <a:cs typeface="Trebuchet MS" pitchFamily="34" charset="-120"/>
               </a:rPr>
-              <a:t>e</a:t>
-            </a:r>
-            <a:endParaRPr lang="en-US" sz="900" dirty="0"/>
-          </a:p>
-        </p:txBody>
-      </p:sp>
-      <p:sp>
-        <p:nvSpPr>
-          <p:cNvPr id="49" name="Shape 47"/>
-          <p:cNvSpPr/>
-          <p:nvPr/>
-        </p:nvSpPr>
-        <p:spPr>
-          <a:xfrm>
-            <a:off x="6870192" y="4169664"/>
-            <a:ext cx="685800" cy="384048"/>
-          </a:xfrm>
-          <a:prstGeom prst="rect">
-            <a:avLst>
-              <a:gd name="adj" fmla="val 9524"/>
-            </a:avLst>
-          </a:prstGeom>
-          <a:solidFill>
-            <a:srgbClr val="FFFFFF"/>
-          </a:solidFill>
-          <a:ln w="12700">
-            <a:solidFill>
-              <a:srgbClr val="DB2777"/>
-            </a:solidFill>
-            <a:prstDash val="solid"/>
-          </a:ln>
-        </p:spPr>
-      </p:sp>
-      <p:sp>
-        <p:nvSpPr>
-          <p:cNvPr id="50" name="Text 48"/>
-          <p:cNvSpPr/>
-          <p:nvPr/>
-        </p:nvSpPr>
-        <p:spPr>
-          <a:xfrm>
-            <a:off x="6870192" y="4169664"/>
-            <a:ext cx="685800" cy="384048"/>
-          </a:xfrm>
-          <a:prstGeom prst="rect">
-            <a:avLst/>
-          </a:prstGeom>
-          <a:noFill/>
-          <a:ln/>
-        </p:spPr>
-        <p:txBody>
-          <a:bodyPr wrap="square" lIns="0" tIns="0" rIns="0" bIns="0" rtlCol="0" anchor="ctr"/>
-          <a:lstStyle/>
-          <a:p>
-            <a:pPr algn="ctr" indent="0" marL="0">
-              <a:buNone/>
-            </a:pPr>
-            <a:r>
-              <a:rPr lang="en-US" sz="900" b="1" dirty="0">
-                <a:solidFill>
-                  <a:srgbClr val="9D174D"/>
-                </a:solidFill>
-                <a:latin typeface="Trebuchet MS" pitchFamily="34" charset="0"/>
-                <a:ea typeface="Trebuchet MS" pitchFamily="34" charset="-122"/>
-                <a:cs typeface="Trebuchet MS" pitchFamily="34" charset="-120"/>
-              </a:rPr>
-              <a:t>c</a:t>
-            </a:r>
-            <a:endParaRPr lang="en-US" sz="900" dirty="0"/>
-          </a:p>
-        </p:txBody>
-      </p:sp>
-      <p:sp>
-        <p:nvSpPr>
-          <p:cNvPr id="51" name="Text 49"/>
-          <p:cNvSpPr/>
-          <p:nvPr/>
-        </p:nvSpPr>
-        <p:spPr>
-          <a:xfrm>
-            <a:off x="6870192" y="4572000"/>
-            <a:ext cx="685800" cy="219456"/>
-          </a:xfrm>
-          <a:prstGeom prst="rect">
-            <a:avLst/>
-          </a:prstGeom>
-          <a:noFill/>
-          <a:ln/>
-        </p:spPr>
-        <p:txBody>
-          <a:bodyPr wrap="square" lIns="0" tIns="0" rIns="0" bIns="0" rtlCol="0" anchor="t"/>
-          <a:lstStyle/>
-          <a:p>
-            <a:pPr algn="ctr" indent="0" marL="0">
-              <a:buNone/>
-            </a:pPr>
-            <a:r>
-              <a:rPr lang="en-US" sz="750" i="1" dirty="0">
-                <a:solidFill>
-                  <a:srgbClr val="94A3B8"/>
-                </a:solidFill>
-                <a:latin typeface="Calibri" pitchFamily="34" charset="0"/>
-                <a:ea typeface="Calibri" pitchFamily="34" charset="-122"/>
-                <a:cs typeface="Calibri" pitchFamily="34" charset="-120"/>
-              </a:rPr>
-              <a:t>/k/</a:t>
-            </a:r>
-            <a:endParaRPr lang="en-US" sz="750" dirty="0"/>
-          </a:p>
-        </p:txBody>
-      </p:sp>
-      <p:sp>
-        <p:nvSpPr>
-          <p:cNvPr id="52" name="Shape 50"/>
-          <p:cNvSpPr/>
-          <p:nvPr/>
-        </p:nvSpPr>
-        <p:spPr>
-          <a:xfrm>
-            <a:off x="7677912" y="4169664"/>
-            <a:ext cx="685800" cy="384048"/>
-          </a:xfrm>
-          <a:prstGeom prst="rect">
-            <a:avLst>
-              <a:gd name="adj" fmla="val 9524"/>
-            </a:avLst>
-          </a:prstGeom>
-          <a:solidFill>
-            <a:srgbClr val="FFFFFF"/>
-          </a:solidFill>
-          <a:ln w="12700">
-            <a:solidFill>
-              <a:srgbClr val="DB2777"/>
-            </a:solidFill>
-            <a:prstDash val="solid"/>
-          </a:ln>
-        </p:spPr>
-      </p:sp>
-      <p:sp>
-        <p:nvSpPr>
-          <p:cNvPr id="53" name="Text 51"/>
-          <p:cNvSpPr/>
-          <p:nvPr/>
-        </p:nvSpPr>
-        <p:spPr>
-          <a:xfrm>
-            <a:off x="7677912" y="4169664"/>
-            <a:ext cx="685800" cy="384048"/>
-          </a:xfrm>
-          <a:prstGeom prst="rect">
-            <a:avLst/>
-          </a:prstGeom>
-          <a:noFill/>
-          <a:ln/>
-        </p:spPr>
-        <p:txBody>
-          <a:bodyPr wrap="square" lIns="0" tIns="0" rIns="0" bIns="0" rtlCol="0" anchor="ctr"/>
-          <a:lstStyle/>
-          <a:p>
-            <a:pPr algn="ctr" indent="0" marL="0">
-              <a:buNone/>
-            </a:pPr>
-            <a:r>
-              <a:rPr lang="en-US" sz="900" b="1" dirty="0">
-                <a:solidFill>
-                  <a:srgbClr val="9D174D"/>
-                </a:solidFill>
-                <a:latin typeface="Trebuchet MS" pitchFamily="34" charset="0"/>
-                <a:ea typeface="Trebuchet MS" pitchFamily="34" charset="-122"/>
-                <a:cs typeface="Trebuchet MS" pitchFamily="34" charset="-120"/>
-              </a:rPr>
-              <a:t>t</a:t>
+              <a:t>le</a:t>
             </a:r>
             <a:endParaRPr lang="en-US" sz="900" dirty="0"/>
           </a:p>
@@ -11678,7 +11507,7 @@
                 <a:ea typeface="Trebuchet MS" pitchFamily="34" charset="-122"/>
                 <a:cs typeface="Trebuchet MS" pitchFamily="34" charset="-120"/>
               </a:rPr>
-              <a:t>restart</a:t>
+              <a:t>replace</a:t>
             </a:r>
             <a:endParaRPr lang="en-US" sz="2800" dirty="0"/>
           </a:p>
@@ -12505,7 +12334,7 @@
                 <a:ea typeface="Trebuchet MS" pitchFamily="34" charset="-122"/>
                 <a:cs typeface="Trebuchet MS" pitchFamily="34" charset="-120"/>
               </a:rPr>
-              <a:t>restart</a:t>
+              <a:t>replace</a:t>
             </a:r>
             <a:endParaRPr lang="en-US" sz="2800" dirty="0"/>
           </a:p>
@@ -12683,7 +12512,7 @@
                 <a:ea typeface="Calibri" pitchFamily="34" charset="-122"/>
                 <a:cs typeface="Calibri" pitchFamily="34" charset="-120"/>
               </a:rPr>
-              <a:t>again</a:t>
+              <a:t>again, back</a:t>
             </a:r>
             <a:endParaRPr lang="en-US" sz="850" dirty="0"/>
           </a:p>
@@ -12756,7 +12585,7 @@
                 <a:ea typeface="Trebuchet MS" pitchFamily="34" charset="-122"/>
                 <a:cs typeface="Trebuchet MS" pitchFamily="34" charset="-120"/>
               </a:rPr>
-              <a:t>start</a:t>
+              <a:t>place</a:t>
             </a:r>
             <a:endParaRPr lang="en-US" sz="1300" dirty="0"/>
           </a:p>
@@ -12795,7 +12624,7 @@
                 <a:ea typeface="Calibri" pitchFamily="34" charset="-122"/>
                 <a:cs typeface="Calibri" pitchFamily="34" charset="-120"/>
               </a:rPr>
-              <a:t>to begin</a:t>
+              <a:t>a position or spot</a:t>
             </a:r>
             <a:endParaRPr lang="en-US" sz="850" dirty="0"/>
           </a:p>
@@ -13490,7 +13319,7 @@
                 <a:ea typeface="Trebuchet MS" pitchFamily="34" charset="-122"/>
                 <a:cs typeface="Trebuchet MS" pitchFamily="34" charset="-120"/>
               </a:rPr>
-              <a:t>restart</a:t>
+              <a:t>replace</a:t>
             </a:r>
             <a:endParaRPr lang="en-US" sz="2800" dirty="0"/>
           </a:p>
@@ -13668,7 +13497,7 @@
                 <a:ea typeface="Calibri" pitchFamily="34" charset="-122"/>
                 <a:cs typeface="Calibri" pitchFamily="34" charset="-120"/>
               </a:rPr>
-              <a:t>again</a:t>
+              <a:t>again, back</a:t>
             </a:r>
             <a:endParaRPr lang="en-US" sz="850" dirty="0"/>
           </a:p>
@@ -13741,7 +13570,7 @@
                 <a:ea typeface="Trebuchet MS" pitchFamily="34" charset="-122"/>
                 <a:cs typeface="Trebuchet MS" pitchFamily="34" charset="-120"/>
               </a:rPr>
-              <a:t>start</a:t>
+              <a:t>place</a:t>
             </a:r>
             <a:endParaRPr lang="en-US" sz="1300" dirty="0"/>
           </a:p>
@@ -13780,7 +13609,7 @@
                 <a:ea typeface="Calibri" pitchFamily="34" charset="-122"/>
                 <a:cs typeface="Calibri" pitchFamily="34" charset="-120"/>
               </a:rPr>
-              <a:t>to begin</a:t>
+              <a:t>a position or spot</a:t>
             </a:r>
             <a:endParaRPr lang="en-US" sz="850" dirty="0"/>
           </a:p>
@@ -14044,7 +13873,7 @@
                 <a:ea typeface="Trebuchet MS" pitchFamily="34" charset="-122"/>
                 <a:cs typeface="Trebuchet MS" pitchFamily="34" charset="-120"/>
               </a:rPr>
-              <a:t>start</a:t>
+              <a:t>place</a:t>
             </a:r>
             <a:endParaRPr lang="en-US" sz="1400" dirty="0"/>
           </a:p>
@@ -14872,7 +14701,7 @@
                 <a:ea typeface="Trebuchet MS" pitchFamily="34" charset="-122"/>
                 <a:cs typeface="Trebuchet MS" pitchFamily="34" charset="-120"/>
               </a:rPr>
-              <a:t>restart</a:t>
+              <a:t>replace</a:t>
             </a:r>
             <a:endParaRPr lang="en-US" sz="2800" dirty="0"/>
           </a:p>
@@ -15050,7 +14879,7 @@
                 <a:ea typeface="Calibri" pitchFamily="34" charset="-122"/>
                 <a:cs typeface="Calibri" pitchFamily="34" charset="-120"/>
               </a:rPr>
-              <a:t>again</a:t>
+              <a:t>again, back</a:t>
             </a:r>
             <a:endParaRPr lang="en-US" sz="850" dirty="0"/>
           </a:p>
@@ -15123,7 +14952,7 @@
                 <a:ea typeface="Trebuchet MS" pitchFamily="34" charset="-122"/>
                 <a:cs typeface="Trebuchet MS" pitchFamily="34" charset="-120"/>
               </a:rPr>
-              <a:t>start</a:t>
+              <a:t>place</a:t>
             </a:r>
             <a:endParaRPr lang="en-US" sz="1300" dirty="0"/>
           </a:p>
@@ -15162,7 +14991,7 @@
                 <a:ea typeface="Calibri" pitchFamily="34" charset="-122"/>
                 <a:cs typeface="Calibri" pitchFamily="34" charset="-120"/>
               </a:rPr>
-              <a:t>to begin</a:t>
+              <a:t>a position or spot</a:t>
             </a:r>
             <a:endParaRPr lang="en-US" sz="850" dirty="0"/>
           </a:p>
@@ -15426,7 +15255,7 @@
                 <a:ea typeface="Trebuchet MS" pitchFamily="34" charset="-122"/>
                 <a:cs typeface="Trebuchet MS" pitchFamily="34" charset="-120"/>
               </a:rPr>
-              <a:t>start</a:t>
+              <a:t>place</a:t>
             </a:r>
             <a:endParaRPr lang="en-US" sz="1400" dirty="0"/>
           </a:p>
@@ -15507,11 +15336,11 @@
         <p:spPr>
           <a:xfrm>
             <a:off x="1874520" y="4096512"/>
-            <a:ext cx="6903720" cy="658368"/>
+            <a:ext cx="6903720" cy="804672"/>
           </a:xfrm>
           <a:prstGeom prst="rect">
             <a:avLst>
-              <a:gd name="adj" fmla="val 8333"/>
+              <a:gd name="adj" fmla="val 6818"/>
             </a:avLst>
           </a:prstGeom>
           <a:solidFill>
@@ -15533,12 +15362,12 @@
         </p:nvSpPr>
         <p:spPr>
           <a:xfrm>
-            <a:off x="2254649" y="4169664"/>
-            <a:ext cx="685800" cy="475488"/>
+            <a:off x="2427732" y="4169664"/>
+            <a:ext cx="685800" cy="384048"/>
           </a:xfrm>
           <a:prstGeom prst="rect">
             <a:avLst>
-              <a:gd name="adj" fmla="val 7692"/>
+              <a:gd name="adj" fmla="val 9524"/>
             </a:avLst>
           </a:prstGeom>
           <a:solidFill>
@@ -15560,8 +15389,8 @@
         </p:nvSpPr>
         <p:spPr>
           <a:xfrm>
-            <a:off x="2254649" y="4169664"/>
-            <a:ext cx="685800" cy="475488"/>
+            <a:off x="2427732" y="4169664"/>
+            <a:ext cx="685800" cy="384048"/>
           </a:xfrm>
           <a:prstGeom prst="rect">
             <a:avLst/>
@@ -15599,12 +15428,12 @@
         </p:nvSpPr>
         <p:spPr>
           <a:xfrm>
-            <a:off x="3293146" y="4169664"/>
-            <a:ext cx="685800" cy="475488"/>
+            <a:off x="3639312" y="4169664"/>
+            <a:ext cx="685800" cy="384048"/>
           </a:xfrm>
           <a:prstGeom prst="rect">
             <a:avLst>
-              <a:gd name="adj" fmla="val 7692"/>
+              <a:gd name="adj" fmla="val 9524"/>
             </a:avLst>
           </a:prstGeom>
           <a:solidFill>
@@ -15626,8 +15455,8 @@
         </p:nvSpPr>
         <p:spPr>
           <a:xfrm>
-            <a:off x="3293146" y="4169664"/>
-            <a:ext cx="685800" cy="475488"/>
+            <a:off x="3639312" y="4169664"/>
+            <a:ext cx="685800" cy="384048"/>
           </a:xfrm>
           <a:prstGeom prst="rect">
             <a:avLst/>
@@ -15665,12 +15494,12 @@
         </p:nvSpPr>
         <p:spPr>
           <a:xfrm>
-            <a:off x="4331643" y="4169664"/>
-            <a:ext cx="685800" cy="475488"/>
+            <a:off x="4850892" y="4169664"/>
+            <a:ext cx="685800" cy="384048"/>
           </a:xfrm>
           <a:prstGeom prst="rect">
             <a:avLst>
-              <a:gd name="adj" fmla="val 7692"/>
+              <a:gd name="adj" fmla="val 9524"/>
             </a:avLst>
           </a:prstGeom>
           <a:solidFill>
@@ -15692,8 +15521,8 @@
         </p:nvSpPr>
         <p:spPr>
           <a:xfrm>
-            <a:off x="4331643" y="4169664"/>
-            <a:ext cx="685800" cy="475488"/>
+            <a:off x="4850892" y="4169664"/>
+            <a:ext cx="685800" cy="384048"/>
           </a:xfrm>
           <a:prstGeom prst="rect">
             <a:avLst/>
@@ -15717,7 +15546,7 @@
                 <a:ea typeface="Trebuchet MS" pitchFamily="34" charset="-122"/>
                 <a:cs typeface="Trebuchet MS" pitchFamily="34" charset="-120"/>
               </a:rPr>
-              <a:t>s</a:t>
+              <a:t>pl</a:t>
             </a:r>
             <a:endParaRPr lang="en-US" sz="900" dirty="0"/>
           </a:p>
@@ -15731,12 +15560,12 @@
         </p:nvSpPr>
         <p:spPr>
           <a:xfrm>
-            <a:off x="5370141" y="4169664"/>
-            <a:ext cx="685800" cy="475488"/>
+            <a:off x="6062472" y="4169664"/>
+            <a:ext cx="685800" cy="384048"/>
           </a:xfrm>
           <a:prstGeom prst="rect">
             <a:avLst>
-              <a:gd name="adj" fmla="val 7692"/>
+              <a:gd name="adj" fmla="val 9524"/>
             </a:avLst>
           </a:prstGeom>
           <a:solidFill>
@@ -15758,8 +15587,8 @@
         </p:nvSpPr>
         <p:spPr>
           <a:xfrm>
-            <a:off x="5370141" y="4169664"/>
-            <a:ext cx="685800" cy="475488"/>
+            <a:off x="6062472" y="4169664"/>
+            <a:ext cx="685800" cy="384048"/>
           </a:xfrm>
           <a:prstGeom prst="rect">
             <a:avLst/>
@@ -15783,7 +15612,7 @@
                 <a:ea typeface="Trebuchet MS" pitchFamily="34" charset="-122"/>
                 <a:cs typeface="Trebuchet MS" pitchFamily="34" charset="-120"/>
               </a:rPr>
-              <a:t>t</a:t>
+              <a:t>a</a:t>
             </a:r>
             <a:endParaRPr lang="en-US" sz="900" dirty="0"/>
           </a:p>
@@ -15797,12 +15626,12 @@
         </p:nvSpPr>
         <p:spPr>
           <a:xfrm>
-            <a:off x="6408638" y="4169664"/>
-            <a:ext cx="685800" cy="475488"/>
+            <a:off x="7274052" y="4169664"/>
+            <a:ext cx="685800" cy="384048"/>
           </a:xfrm>
           <a:prstGeom prst="rect">
             <a:avLst>
-              <a:gd name="adj" fmla="val 7692"/>
+              <a:gd name="adj" fmla="val 9524"/>
             </a:avLst>
           </a:prstGeom>
           <a:solidFill>
@@ -15824,8 +15653,8 @@
         </p:nvSpPr>
         <p:spPr>
           <a:xfrm>
-            <a:off x="6408638" y="4169664"/>
-            <a:ext cx="685800" cy="475488"/>
+            <a:off x="7274052" y="4169664"/>
+            <a:ext cx="685800" cy="384048"/>
           </a:xfrm>
           <a:prstGeom prst="rect">
             <a:avLst/>
@@ -15849,7 +15678,7 @@
                 <a:ea typeface="Trebuchet MS" pitchFamily="34" charset="-122"/>
                 <a:cs typeface="Trebuchet MS" pitchFamily="34" charset="-120"/>
               </a:rPr>
-              <a:t>ar</a:t>
+              <a:t>ce</a:t>
             </a:r>
             <a:endParaRPr lang="en-US" sz="900" dirty="0"/>
           </a:p>
@@ -15857,67 +15686,40 @@
       </p:sp>
       <p:sp>
         <p:nvSpPr>
-          <p:cNvPr id="43" name="Shape 41"/>
-          <p:cNvSpPr/>
-          <p:nvPr/>
-        </p:nvSpPr>
-        <p:spPr>
-          <a:xfrm>
-            <a:off x="7447135" y="4169664"/>
-            <a:ext cx="685800" cy="475488"/>
-          </a:xfrm>
-          <a:prstGeom prst="rect">
-            <a:avLst>
-              <a:gd name="adj" fmla="val 7692"/>
-            </a:avLst>
-          </a:prstGeom>
-          <a:solidFill>
-            <a:srgbClr val="FFFFFF"/>
-          </a:solidFill>
-          <a:ln w="12700">
-            <a:solidFill>
-              <a:srgbClr val="DB2777"/>
-            </a:solidFill>
-            <a:prstDash val="solid"/>
-          </a:ln>
-        </p:spPr>
-      </p:sp>
-      <p:sp>
-        <p:nvSpPr>
-          <p:cNvPr id="44" name="Text 42"/>
-          <p:cNvSpPr/>
-          <p:nvPr/>
-        </p:nvSpPr>
-        <p:spPr>
-          <a:xfrm>
-            <a:off x="7447135" y="4169664"/>
-            <a:ext cx="685800" cy="475488"/>
-          </a:xfrm>
-          <a:prstGeom prst="rect">
-            <a:avLst/>
-          </a:prstGeom>
-          <a:noFill/>
-          <a:ln/>
-        </p:spPr>
-        <p:txBody>
-          <a:bodyPr wrap="square" lIns="0" tIns="0" rIns="0" bIns="0" rtlCol="0" anchor="ctr"/>
-          <a:lstStyle/>
-          <a:p>
-            <a:pPr algn="ctr" indent="0" marL="0">
-              <a:buNone/>
-            </a:pPr>
-            <a:r>
-              <a:rPr lang="en-US" sz="900" b="1" dirty="0">
-                <a:solidFill>
-                  <a:srgbClr val="9D174D"/>
-                </a:solidFill>
-                <a:latin typeface="Trebuchet MS" pitchFamily="34" charset="0"/>
-                <a:ea typeface="Trebuchet MS" pitchFamily="34" charset="-122"/>
-                <a:cs typeface="Trebuchet MS" pitchFamily="34" charset="-120"/>
-              </a:rPr>
-              <a:t>t</a:t>
-            </a:r>
-            <a:endParaRPr lang="en-US" sz="900" dirty="0"/>
+          <p:cNvPr id="43" name="Text 41"/>
+          <p:cNvSpPr/>
+          <p:nvPr/>
+        </p:nvSpPr>
+        <p:spPr>
+          <a:xfrm>
+            <a:off x="7274052" y="4572000"/>
+            <a:ext cx="685800" cy="219456"/>
+          </a:xfrm>
+          <a:prstGeom prst="rect">
+            <a:avLst/>
+          </a:prstGeom>
+          <a:noFill/>
+          <a:ln/>
+        </p:spPr>
+        <p:txBody>
+          <a:bodyPr wrap="square" lIns="0" tIns="0" rIns="0" bIns="0" rtlCol="0" anchor="t"/>
+          <a:lstStyle/>
+          <a:p>
+            <a:pPr algn="ctr" indent="0" marL="0">
+              <a:buNone/>
+            </a:pPr>
+            <a:r>
+              <a:rPr lang="en-US" sz="750" i="1" dirty="0">
+                <a:solidFill>
+                  <a:srgbClr val="94A3B8"/>
+                </a:solidFill>
+                <a:latin typeface="Calibri" pitchFamily="34" charset="0"/>
+                <a:ea typeface="Calibri" pitchFamily="34" charset="-122"/>
+                <a:cs typeface="Calibri" pitchFamily="34" charset="-120"/>
+              </a:rPr>
+              <a:t>/s/</a:t>
+            </a:r>
+            <a:endParaRPr lang="en-US" sz="750" dirty="0"/>
           </a:p>
         </p:txBody>
       </p:sp>
@@ -17241,7 +17043,7 @@
                 <a:ea typeface="Calibri" pitchFamily="34" charset="-122"/>
                 <a:cs typeface="Calibri" pitchFamily="34" charset="-120"/>
               </a:rPr>
-              <a:t>After </a:t>
+              <a:t>After the storm, we had to </a:t>
             </a:r>
             <a:pPr algn="l" indent="0" marL="0">
               <a:buNone/>
@@ -17258,7 +17060,7 @@
                 <a:ea typeface="Calibri" pitchFamily="34" charset="-122"/>
                 <a:cs typeface="Calibri" pitchFamily="34" charset="-120"/>
               </a:rPr>
-              <a:t>reviewing</a:t>
+              <a:t>rebuild</a:t>
             </a:r>
             <a:pPr algn="l" indent="0" marL="0">
               <a:buNone/>
@@ -17272,7 +17074,7 @@
                 <a:ea typeface="Calibri" pitchFamily="34" charset="-122"/>
                 <a:cs typeface="Calibri" pitchFamily="34" charset="-120"/>
               </a:rPr>
-              <a:t> his work, Tom decided to </a:t>
+              <a:t> the fence, </a:t>
             </a:r>
             <a:pPr algn="l" indent="0" marL="0">
               <a:buNone/>
@@ -17289,7 +17091,7 @@
                 <a:ea typeface="Calibri" pitchFamily="34" charset="-122"/>
                 <a:cs typeface="Calibri" pitchFamily="34" charset="-120"/>
               </a:rPr>
-              <a:t>rewrite</a:t>
+              <a:t>rethink</a:t>
             </a:r>
             <a:pPr algn="l" indent="0" marL="0">
               <a:buNone/>
@@ -17303,7 +17105,7 @@
                 <a:ea typeface="Calibri" pitchFamily="34" charset="-122"/>
                 <a:cs typeface="Calibri" pitchFamily="34" charset="-120"/>
               </a:rPr>
-              <a:t> his conclusion and </a:t>
+              <a:t> our garden plan, and </a:t>
             </a:r>
             <a:pPr algn="l" indent="0" marL="0">
               <a:buNone/>
@@ -17320,7 +17122,7 @@
                 <a:ea typeface="Calibri" pitchFamily="34" charset="-122"/>
                 <a:cs typeface="Calibri" pitchFamily="34" charset="-120"/>
               </a:rPr>
-              <a:t>reorder</a:t>
+              <a:t>revisit</a:t>
             </a:r>
             <a:pPr algn="l" indent="0" marL="0">
               <a:buNone/>
@@ -17334,7 +17136,7 @@
                 <a:ea typeface="Calibri" pitchFamily="34" charset="-122"/>
                 <a:cs typeface="Calibri" pitchFamily="34" charset="-120"/>
               </a:rPr>
-              <a:t> his ideas.</a:t>
+              <a:t> the damage each day.</a:t>
             </a:r>
             <a:endParaRPr lang="en-US" sz="1800" dirty="0"/>
           </a:p>
@@ -17489,7 +17291,7 @@
                 <a:ea typeface="Trebuchet MS" pitchFamily="34" charset="-122"/>
                 <a:cs typeface="Trebuchet MS" pitchFamily="34" charset="-120"/>
               </a:rPr>
-              <a:t>reviewing</a:t>
+              <a:t>rebuild</a:t>
             </a:r>
             <a:endParaRPr lang="en-US" sz="1400" dirty="0"/>
           </a:p>
@@ -17617,7 +17419,7 @@
                 <a:ea typeface="Trebuchet MS" pitchFamily="34" charset="-122"/>
                 <a:cs typeface="Trebuchet MS" pitchFamily="34" charset="-120"/>
               </a:rPr>
-              <a:t>rewrite</a:t>
+              <a:t>rethink</a:t>
             </a:r>
             <a:endParaRPr lang="en-US" sz="1400" dirty="0"/>
           </a:p>
@@ -17745,7 +17547,7 @@
                 <a:ea typeface="Trebuchet MS" pitchFamily="34" charset="-122"/>
                 <a:cs typeface="Trebuchet MS" pitchFamily="34" charset="-120"/>
               </a:rPr>
-              <a:t>reorder</a:t>
+              <a:t>revisit</a:t>
             </a:r>
             <a:endParaRPr lang="en-US" sz="1400" dirty="0"/>
           </a:p>
@@ -18215,7 +18017,7 @@
                 <a:ea typeface="Trebuchet MS" pitchFamily="34" charset="-122"/>
                 <a:cs typeface="Trebuchet MS" pitchFamily="34" charset="-120"/>
               </a:rPr>
-              <a:t>reviewing</a:t>
+              <a:t>rebuild</a:t>
             </a:r>
             <a:endParaRPr lang="en-US" sz="2800" dirty="0"/>
           </a:p>
@@ -19042,7 +18844,7 @@
                 <a:ea typeface="Trebuchet MS" pitchFamily="34" charset="-122"/>
                 <a:cs typeface="Trebuchet MS" pitchFamily="34" charset="-120"/>
               </a:rPr>
-              <a:t>reviewing</a:t>
+              <a:t>rebuild</a:t>
             </a:r>
             <a:endParaRPr lang="en-US" sz="2800" dirty="0"/>
           </a:p>
@@ -19122,7 +18924,7 @@
         </p:nvSpPr>
         <p:spPr>
           <a:xfrm>
-            <a:off x="2221992" y="2258568"/>
+            <a:off x="2938272" y="2258568"/>
             <a:ext cx="1828800" cy="292608"/>
           </a:xfrm>
           <a:prstGeom prst="rect">
@@ -19156,7 +18958,7 @@
         </p:nvSpPr>
         <p:spPr>
           <a:xfrm>
-            <a:off x="2221992" y="2258568"/>
+            <a:off x="2938272" y="2258568"/>
             <a:ext cx="1828800" cy="292608"/>
           </a:xfrm>
           <a:prstGeom prst="rect">
@@ -19195,7 +18997,7 @@
         </p:nvSpPr>
         <p:spPr>
           <a:xfrm>
-            <a:off x="2221992" y="2569464"/>
+            <a:off x="2938272" y="2569464"/>
             <a:ext cx="1828800" cy="201168"/>
           </a:xfrm>
           <a:prstGeom prst="rect">
@@ -19234,7 +19036,7 @@
         </p:nvSpPr>
         <p:spPr>
           <a:xfrm>
-            <a:off x="4370832" y="2258568"/>
+            <a:off x="5803392" y="2258568"/>
             <a:ext cx="1828800" cy="292608"/>
           </a:xfrm>
           <a:prstGeom prst="rect">
@@ -19268,7 +19070,7 @@
         </p:nvSpPr>
         <p:spPr>
           <a:xfrm>
-            <a:off x="4370832" y="2258568"/>
+            <a:off x="5803392" y="2258568"/>
             <a:ext cx="1828800" cy="292608"/>
           </a:xfrm>
           <a:prstGeom prst="rect">
@@ -19293,7 +19095,7 @@
                 <a:ea typeface="Trebuchet MS" pitchFamily="34" charset="-122"/>
                 <a:cs typeface="Trebuchet MS" pitchFamily="34" charset="-120"/>
               </a:rPr>
-              <a:t>view</a:t>
+              <a:t>build</a:t>
             </a:r>
             <a:endParaRPr lang="en-US" sz="1300" dirty="0"/>
           </a:p>
@@ -19307,7 +19109,7 @@
         </p:nvSpPr>
         <p:spPr>
           <a:xfrm>
-            <a:off x="4370832" y="2569464"/>
+            <a:off x="5803392" y="2569464"/>
             <a:ext cx="1828800" cy="201168"/>
           </a:xfrm>
           <a:prstGeom prst="rect">
@@ -19332,7 +19134,7 @@
                 <a:ea typeface="Calibri" pitchFamily="34" charset="-122"/>
                 <a:cs typeface="Calibri" pitchFamily="34" charset="-120"/>
               </a:rPr>
-              <a:t>to look at</a:t>
+              <a:t>to construct or make</a:t>
             </a:r>
             <a:endParaRPr lang="en-US" sz="850" dirty="0"/>
           </a:p>
@@ -19346,30 +19148,23 @@
         </p:nvSpPr>
         <p:spPr>
           <a:xfrm>
-            <a:off x="6519672" y="2258568"/>
-            <a:ext cx="1828800" cy="292608"/>
+            <a:off x="365760" y="3273552"/>
+            <a:ext cx="1371600" cy="658368"/>
           </a:xfrm>
           <a:prstGeom prst="rect">
             <a:avLst>
-              <a:gd name="adj" fmla="val 25000"/>
+              <a:gd name="adj" fmla="val 8333"/>
             </a:avLst>
           </a:prstGeom>
           <a:solidFill>
-            <a:srgbClr val="FCE7F3"/>
-          </a:solidFill>
-          <a:ln w="19050">
-            <a:solidFill>
-              <a:srgbClr val="DB2777"/>
-            </a:solidFill>
-            <a:prstDash val="solid"/>
-          </a:ln>
-          <a:effectLst>
-            <a:outerShdw sx="100000" sy="100000" kx="0" ky="0" algn="bl" rotWithShape="0" blurRad="101600" dist="38100" dir="8100000">
-              <a:srgbClr val="000000">
-                <a:alpha val="12000"/>
-              </a:srgbClr>
-            </a:outerShdw>
-          </a:effectLst>
+            <a:srgbClr val="E2E8F0"/>
+          </a:solidFill>
+          <a:ln w="12700">
+            <a:solidFill>
+              <a:srgbClr val="E2E8F0"/>
+            </a:solidFill>
+            <a:prstDash val="solid"/>
+          </a:ln>
         </p:spPr>
       </p:sp>
       <p:sp>
@@ -19380,8 +19175,8 @@
         </p:nvSpPr>
         <p:spPr>
           <a:xfrm>
-            <a:off x="6519672" y="2258568"/>
-            <a:ext cx="1828800" cy="292608"/>
+            <a:off x="365760" y="3273552"/>
+            <a:ext cx="1371600" cy="658368"/>
           </a:xfrm>
           <a:prstGeom prst="rect">
             <a:avLst/>
@@ -19397,73 +19192,100 @@
               <a:buNone/>
             </a:pPr>
             <a:r>
-              <a:rPr lang="en-US" sz="1300" b="1" dirty="0">
-                <a:solidFill>
-                  <a:srgbClr val="9D174D"/>
+              <a:rPr lang="en-US" sz="1100" b="1" dirty="0">
+                <a:solidFill>
+                  <a:srgbClr val="475569"/>
                 </a:solidFill>
                 <a:latin typeface="Trebuchet MS" pitchFamily="34" charset="0"/>
                 <a:ea typeface="Trebuchet MS" pitchFamily="34" charset="-122"/>
                 <a:cs typeface="Trebuchet MS" pitchFamily="34" charset="-120"/>
               </a:rPr>
-              <a:t>ing</a:t>
-            </a:r>
-            <a:endParaRPr lang="en-US" sz="1300" dirty="0"/>
-          </a:p>
-        </p:txBody>
-      </p:sp>
-      <p:sp>
-        <p:nvSpPr>
-          <p:cNvPr id="24" name="Text 22"/>
-          <p:cNvSpPr/>
-          <p:nvPr/>
-        </p:nvSpPr>
-        <p:spPr>
-          <a:xfrm>
-            <a:off x="6519672" y="2569464"/>
-            <a:ext cx="1828800" cy="201168"/>
-          </a:xfrm>
-          <a:prstGeom prst="rect">
-            <a:avLst/>
-          </a:prstGeom>
-          <a:noFill/>
-          <a:ln/>
-        </p:spPr>
-        <p:txBody>
-          <a:bodyPr wrap="square" lIns="0" tIns="0" rIns="0" bIns="0" rtlCol="0" anchor="t"/>
-          <a:lstStyle/>
-          <a:p>
-            <a:pPr algn="ctr" indent="0" marL="0">
-              <a:buNone/>
-            </a:pPr>
-            <a:r>
-              <a:rPr lang="en-US" sz="850" dirty="0">
-                <a:solidFill>
-                  <a:srgbClr val="475569"/>
+              <a:t>Syllables</a:t>
+            </a:r>
+            <a:endParaRPr lang="en-US" sz="1100" dirty="0"/>
+          </a:p>
+        </p:txBody>
+      </p:sp>
+      <p:sp>
+        <p:nvSpPr>
+          <p:cNvPr id="24" name="Shape 22"/>
+          <p:cNvSpPr/>
+          <p:nvPr/>
+        </p:nvSpPr>
+        <p:spPr>
+          <a:xfrm>
+            <a:off x="1874520" y="3273552"/>
+            <a:ext cx="6903720" cy="658368"/>
+          </a:xfrm>
+          <a:prstGeom prst="rect">
+            <a:avLst>
+              <a:gd name="adj" fmla="val 8333"/>
+            </a:avLst>
+          </a:prstGeom>
+          <a:solidFill>
+            <a:srgbClr val="F8FAFC"/>
+          </a:solidFill>
+          <a:ln w="12700">
+            <a:solidFill>
+              <a:srgbClr val="E2E8F0"/>
+            </a:solidFill>
+            <a:prstDash val="dash"/>
+          </a:ln>
+        </p:spPr>
+      </p:sp>
+      <p:sp>
+        <p:nvSpPr>
+          <p:cNvPr id="25" name="Text 23"/>
+          <p:cNvSpPr/>
+          <p:nvPr/>
+        </p:nvSpPr>
+        <p:spPr>
+          <a:xfrm>
+            <a:off x="1874520" y="3273552"/>
+            <a:ext cx="6903720" cy="658368"/>
+          </a:xfrm>
+          <a:prstGeom prst="rect">
+            <a:avLst/>
+          </a:prstGeom>
+          <a:noFill/>
+          <a:ln/>
+        </p:spPr>
+        <p:txBody>
+          <a:bodyPr wrap="square" rtlCol="0" anchor="ctr"/>
+          <a:lstStyle/>
+          <a:p>
+            <a:pPr algn="ctr" indent="0" marL="0">
+              <a:buNone/>
+            </a:pPr>
+            <a:r>
+              <a:rPr lang="en-US" sz="1100" i="1" dirty="0">
+                <a:solidFill>
+                  <a:srgbClr val="CBD5E1"/>
                 </a:solidFill>
                 <a:latin typeface="Calibri" pitchFamily="34" charset="0"/>
                 <a:ea typeface="Calibri" pitchFamily="34" charset="-122"/>
                 <a:cs typeface="Calibri" pitchFamily="34" charset="-120"/>
               </a:rPr>
-              <a:t>ongoing action</a:t>
-            </a:r>
-            <a:endParaRPr lang="en-US" sz="850" dirty="0"/>
-          </a:p>
-        </p:txBody>
-      </p:sp>
-      <p:sp>
-        <p:nvSpPr>
-          <p:cNvPr id="25" name="Shape 23"/>
-          <p:cNvSpPr/>
-          <p:nvPr/>
-        </p:nvSpPr>
-        <p:spPr>
-          <a:xfrm>
-            <a:off x="365760" y="3273552"/>
-            <a:ext cx="1371600" cy="658368"/>
+              <a:t>Write here...</a:t>
+            </a:r>
+            <a:endParaRPr lang="en-US" sz="1100" dirty="0"/>
+          </a:p>
+        </p:txBody>
+      </p:sp>
+      <p:sp>
+        <p:nvSpPr>
+          <p:cNvPr id="26" name="Shape 24"/>
+          <p:cNvSpPr/>
+          <p:nvPr/>
+        </p:nvSpPr>
+        <p:spPr>
+          <a:xfrm>
+            <a:off x="365760" y="4096512"/>
+            <a:ext cx="1371600" cy="804672"/>
           </a:xfrm>
           <a:prstGeom prst="rect">
             <a:avLst>
-              <a:gd name="adj" fmla="val 8333"/>
+              <a:gd name="adj" fmla="val 6818"/>
             </a:avLst>
           </a:prstGeom>
           <a:solidFill>
@@ -19479,14 +19301,14 @@
       </p:sp>
       <p:sp>
         <p:nvSpPr>
-          <p:cNvPr id="26" name="Text 24"/>
-          <p:cNvSpPr/>
-          <p:nvPr/>
-        </p:nvSpPr>
-        <p:spPr>
-          <a:xfrm>
-            <a:off x="365760" y="3273552"/>
-            <a:ext cx="1371600" cy="658368"/>
+          <p:cNvPr id="27" name="Text 25"/>
+          <p:cNvSpPr/>
+          <p:nvPr/>
+        </p:nvSpPr>
+        <p:spPr>
+          <a:xfrm>
+            <a:off x="365760" y="4096512"/>
+            <a:ext cx="1371600" cy="804672"/>
           </a:xfrm>
           <a:prstGeom prst="rect">
             <a:avLst/>
@@ -19510,7 +19332,7 @@
                 <a:ea typeface="Trebuchet MS" pitchFamily="34" charset="-122"/>
                 <a:cs typeface="Trebuchet MS" pitchFamily="34" charset="-120"/>
               </a:rPr>
-              <a:t>Syllables</a:t>
+              <a:t>Phonemes</a:t>
             </a:r>
             <a:endParaRPr lang="en-US" sz="1100" dirty="0"/>
           </a:p>
@@ -19518,80 +19340,14 @@
       </p:sp>
       <p:sp>
         <p:nvSpPr>
-          <p:cNvPr id="27" name="Shape 25"/>
-          <p:cNvSpPr/>
-          <p:nvPr/>
-        </p:nvSpPr>
-        <p:spPr>
-          <a:xfrm>
-            <a:off x="1874520" y="3273552"/>
-            <a:ext cx="6903720" cy="658368"/>
-          </a:xfrm>
-          <a:prstGeom prst="rect">
-            <a:avLst>
-              <a:gd name="adj" fmla="val 8333"/>
-            </a:avLst>
-          </a:prstGeom>
-          <a:solidFill>
-            <a:srgbClr val="F8FAFC"/>
-          </a:solidFill>
-          <a:ln w="12700">
-            <a:solidFill>
-              <a:srgbClr val="E2E8F0"/>
-            </a:solidFill>
-            <a:prstDash val="dash"/>
-          </a:ln>
-        </p:spPr>
-      </p:sp>
-      <p:sp>
-        <p:nvSpPr>
-          <p:cNvPr id="28" name="Text 26"/>
-          <p:cNvSpPr/>
-          <p:nvPr/>
-        </p:nvSpPr>
-        <p:spPr>
-          <a:xfrm>
-            <a:off x="1874520" y="3273552"/>
-            <a:ext cx="6903720" cy="658368"/>
-          </a:xfrm>
-          <a:prstGeom prst="rect">
-            <a:avLst/>
-          </a:prstGeom>
-          <a:noFill/>
-          <a:ln/>
-        </p:spPr>
-        <p:txBody>
-          <a:bodyPr wrap="square" rtlCol="0" anchor="ctr"/>
-          <a:lstStyle/>
-          <a:p>
-            <a:pPr algn="ctr" indent="0" marL="0">
-              <a:buNone/>
-            </a:pPr>
-            <a:r>
-              <a:rPr lang="en-US" sz="1100" i="1" dirty="0">
-                <a:solidFill>
-                  <a:srgbClr val="CBD5E1"/>
-                </a:solidFill>
-                <a:latin typeface="Calibri" pitchFamily="34" charset="0"/>
-                <a:ea typeface="Calibri" pitchFamily="34" charset="-122"/>
-                <a:cs typeface="Calibri" pitchFamily="34" charset="-120"/>
-              </a:rPr>
-              <a:t>Write here...</a:t>
-            </a:r>
-            <a:endParaRPr lang="en-US" sz="1100" dirty="0"/>
-          </a:p>
-        </p:txBody>
-      </p:sp>
-      <p:sp>
-        <p:nvSpPr>
-          <p:cNvPr id="29" name="Shape 27"/>
-          <p:cNvSpPr/>
-          <p:nvPr/>
-        </p:nvSpPr>
-        <p:spPr>
-          <a:xfrm>
-            <a:off x="365760" y="4096512"/>
-            <a:ext cx="1371600" cy="804672"/>
+          <p:cNvPr id="28" name="Shape 26"/>
+          <p:cNvSpPr/>
+          <p:nvPr/>
+        </p:nvSpPr>
+        <p:spPr>
+          <a:xfrm>
+            <a:off x="1874520" y="4096512"/>
+            <a:ext cx="6903720" cy="804672"/>
           </a:xfrm>
           <a:prstGeom prst="rect">
             <a:avLst>
@@ -19599,85 +19355,19 @@
             </a:avLst>
           </a:prstGeom>
           <a:solidFill>
-            <a:srgbClr val="E2E8F0"/>
+            <a:srgbClr val="F8FAFC"/>
           </a:solidFill>
           <a:ln w="12700">
             <a:solidFill>
               <a:srgbClr val="E2E8F0"/>
             </a:solidFill>
-            <a:prstDash val="solid"/>
-          </a:ln>
-        </p:spPr>
-      </p:sp>
-      <p:sp>
-        <p:nvSpPr>
-          <p:cNvPr id="30" name="Text 28"/>
-          <p:cNvSpPr/>
-          <p:nvPr/>
-        </p:nvSpPr>
-        <p:spPr>
-          <a:xfrm>
-            <a:off x="365760" y="4096512"/>
-            <a:ext cx="1371600" cy="804672"/>
-          </a:xfrm>
-          <a:prstGeom prst="rect">
-            <a:avLst/>
-          </a:prstGeom>
-          <a:noFill/>
-          <a:ln/>
-        </p:spPr>
-        <p:txBody>
-          <a:bodyPr wrap="square" lIns="0" tIns="0" rIns="0" bIns="0" rtlCol="0" anchor="ctr"/>
-          <a:lstStyle/>
-          <a:p>
-            <a:pPr algn="ctr" indent="0" marL="0">
-              <a:buNone/>
-            </a:pPr>
-            <a:r>
-              <a:rPr lang="en-US" sz="1100" b="1" dirty="0">
-                <a:solidFill>
-                  <a:srgbClr val="475569"/>
-                </a:solidFill>
-                <a:latin typeface="Trebuchet MS" pitchFamily="34" charset="0"/>
-                <a:ea typeface="Trebuchet MS" pitchFamily="34" charset="-122"/>
-                <a:cs typeface="Trebuchet MS" pitchFamily="34" charset="-120"/>
-              </a:rPr>
-              <a:t>Phonemes</a:t>
-            </a:r>
-            <a:endParaRPr lang="en-US" sz="1100" dirty="0"/>
-          </a:p>
-        </p:txBody>
-      </p:sp>
-      <p:sp>
-        <p:nvSpPr>
-          <p:cNvPr id="31" name="Shape 29"/>
-          <p:cNvSpPr/>
-          <p:nvPr/>
-        </p:nvSpPr>
-        <p:spPr>
-          <a:xfrm>
-            <a:off x="1874520" y="4096512"/>
-            <a:ext cx="6903720" cy="804672"/>
-          </a:xfrm>
-          <a:prstGeom prst="rect">
-            <a:avLst>
-              <a:gd name="adj" fmla="val 6818"/>
-            </a:avLst>
-          </a:prstGeom>
-          <a:solidFill>
-            <a:srgbClr val="F8FAFC"/>
-          </a:solidFill>
-          <a:ln w="12700">
-            <a:solidFill>
-              <a:srgbClr val="E2E8F0"/>
-            </a:solidFill>
             <a:prstDash val="dash"/>
           </a:ln>
         </p:spPr>
       </p:sp>
       <p:sp>
         <p:nvSpPr>
-          <p:cNvPr id="32" name="Text 30"/>
+          <p:cNvPr id="29" name="Text 27"/>
           <p:cNvSpPr/>
           <p:nvPr/>
         </p:nvSpPr>
@@ -20139,7 +19829,7 @@
                 <a:ea typeface="Trebuchet MS" pitchFamily="34" charset="-122"/>
                 <a:cs typeface="Trebuchet MS" pitchFamily="34" charset="-120"/>
               </a:rPr>
-              <a:t>reviewing</a:t>
+              <a:t>rebuild</a:t>
             </a:r>
             <a:endParaRPr lang="en-US" sz="2800" dirty="0"/>
           </a:p>
@@ -20219,7 +19909,7 @@
         </p:nvSpPr>
         <p:spPr>
           <a:xfrm>
-            <a:off x="2221992" y="2258568"/>
+            <a:off x="2938272" y="2258568"/>
             <a:ext cx="1828800" cy="292608"/>
           </a:xfrm>
           <a:prstGeom prst="rect">
@@ -20253,7 +19943,7 @@
         </p:nvSpPr>
         <p:spPr>
           <a:xfrm>
-            <a:off x="2221992" y="2258568"/>
+            <a:off x="2938272" y="2258568"/>
             <a:ext cx="1828800" cy="292608"/>
           </a:xfrm>
           <a:prstGeom prst="rect">
@@ -20292,7 +19982,7 @@
         </p:nvSpPr>
         <p:spPr>
           <a:xfrm>
-            <a:off x="2221992" y="2569464"/>
+            <a:off x="2938272" y="2569464"/>
             <a:ext cx="1828800" cy="201168"/>
           </a:xfrm>
           <a:prstGeom prst="rect">
@@ -20331,7 +20021,7 @@
         </p:nvSpPr>
         <p:spPr>
           <a:xfrm>
-            <a:off x="4370832" y="2258568"/>
+            <a:off x="5803392" y="2258568"/>
             <a:ext cx="1828800" cy="292608"/>
           </a:xfrm>
           <a:prstGeom prst="rect">
@@ -20365,7 +20055,7 @@
         </p:nvSpPr>
         <p:spPr>
           <a:xfrm>
-            <a:off x="4370832" y="2258568"/>
+            <a:off x="5803392" y="2258568"/>
             <a:ext cx="1828800" cy="292608"/>
           </a:xfrm>
           <a:prstGeom prst="rect">
@@ -20390,7 +20080,7 @@
                 <a:ea typeface="Trebuchet MS" pitchFamily="34" charset="-122"/>
                 <a:cs typeface="Trebuchet MS" pitchFamily="34" charset="-120"/>
               </a:rPr>
-              <a:t>view</a:t>
+              <a:t>build</a:t>
             </a:r>
             <a:endParaRPr lang="en-US" sz="1300" dirty="0"/>
           </a:p>
@@ -20404,7 +20094,7 @@
         </p:nvSpPr>
         <p:spPr>
           <a:xfrm>
-            <a:off x="4370832" y="2569464"/>
+            <a:off x="5803392" y="2569464"/>
             <a:ext cx="1828800" cy="201168"/>
           </a:xfrm>
           <a:prstGeom prst="rect">
@@ -20429,7 +20119,7 @@
                 <a:ea typeface="Calibri" pitchFamily="34" charset="-122"/>
                 <a:cs typeface="Calibri" pitchFamily="34" charset="-120"/>
               </a:rPr>
-              <a:t>to look at</a:t>
+              <a:t>to construct or make</a:t>
             </a:r>
             <a:endParaRPr lang="en-US" sz="850" dirty="0"/>
           </a:p>
@@ -20443,30 +20133,23 @@
         </p:nvSpPr>
         <p:spPr>
           <a:xfrm>
-            <a:off x="6519672" y="2258568"/>
-            <a:ext cx="1828800" cy="292608"/>
+            <a:off x="365760" y="3273552"/>
+            <a:ext cx="1371600" cy="658368"/>
           </a:xfrm>
           <a:prstGeom prst="rect">
             <a:avLst>
-              <a:gd name="adj" fmla="val 25000"/>
+              <a:gd name="adj" fmla="val 8333"/>
             </a:avLst>
           </a:prstGeom>
           <a:solidFill>
-            <a:srgbClr val="FCE7F3"/>
-          </a:solidFill>
-          <a:ln w="19050">
-            <a:solidFill>
-              <a:srgbClr val="DB2777"/>
-            </a:solidFill>
-            <a:prstDash val="solid"/>
-          </a:ln>
-          <a:effectLst>
-            <a:outerShdw sx="100000" sy="100000" kx="0" ky="0" algn="bl" rotWithShape="0" blurRad="101600" dist="38100" dir="8100000">
-              <a:srgbClr val="000000">
-                <a:alpha val="12000"/>
-              </a:srgbClr>
-            </a:outerShdw>
-          </a:effectLst>
+            <a:srgbClr val="E2E8F0"/>
+          </a:solidFill>
+          <a:ln w="12700">
+            <a:solidFill>
+              <a:srgbClr val="E2E8F0"/>
+            </a:solidFill>
+            <a:prstDash val="solid"/>
+          </a:ln>
         </p:spPr>
       </p:sp>
       <p:sp>
@@ -20477,8 +20160,8 @@
         </p:nvSpPr>
         <p:spPr>
           <a:xfrm>
-            <a:off x="6519672" y="2258568"/>
-            <a:ext cx="1828800" cy="292608"/>
+            <a:off x="365760" y="3273552"/>
+            <a:ext cx="1371600" cy="658368"/>
           </a:xfrm>
           <a:prstGeom prst="rect">
             <a:avLst/>
@@ -20494,69 +20177,30 @@
               <a:buNone/>
             </a:pPr>
             <a:r>
-              <a:rPr lang="en-US" sz="1300" b="1" dirty="0">
-                <a:solidFill>
-                  <a:srgbClr val="9D174D"/>
+              <a:rPr lang="en-US" sz="1100" b="1" dirty="0">
+                <a:solidFill>
+                  <a:srgbClr val="475569"/>
                 </a:solidFill>
                 <a:latin typeface="Trebuchet MS" pitchFamily="34" charset="0"/>
                 <a:ea typeface="Trebuchet MS" pitchFamily="34" charset="-122"/>
                 <a:cs typeface="Trebuchet MS" pitchFamily="34" charset="-120"/>
               </a:rPr>
-              <a:t>ing</a:t>
-            </a:r>
-            <a:endParaRPr lang="en-US" sz="1300" dirty="0"/>
-          </a:p>
-        </p:txBody>
-      </p:sp>
-      <p:sp>
-        <p:nvSpPr>
-          <p:cNvPr id="24" name="Text 22"/>
-          <p:cNvSpPr/>
-          <p:nvPr/>
-        </p:nvSpPr>
-        <p:spPr>
-          <a:xfrm>
-            <a:off x="6519672" y="2569464"/>
-            <a:ext cx="1828800" cy="201168"/>
-          </a:xfrm>
-          <a:prstGeom prst="rect">
-            <a:avLst/>
-          </a:prstGeom>
-          <a:noFill/>
-          <a:ln/>
-        </p:spPr>
-        <p:txBody>
-          <a:bodyPr wrap="square" lIns="0" tIns="0" rIns="0" bIns="0" rtlCol="0" anchor="t"/>
-          <a:lstStyle/>
-          <a:p>
-            <a:pPr algn="ctr" indent="0" marL="0">
-              <a:buNone/>
-            </a:pPr>
-            <a:r>
-              <a:rPr lang="en-US" sz="850" dirty="0">
-                <a:solidFill>
-                  <a:srgbClr val="475569"/>
-                </a:solidFill>
-                <a:latin typeface="Calibri" pitchFamily="34" charset="0"/>
-                <a:ea typeface="Calibri" pitchFamily="34" charset="-122"/>
-                <a:cs typeface="Calibri" pitchFamily="34" charset="-120"/>
-              </a:rPr>
-              <a:t>ongoing action</a:t>
-            </a:r>
-            <a:endParaRPr lang="en-US" sz="850" dirty="0"/>
-          </a:p>
-        </p:txBody>
-      </p:sp>
-      <p:sp>
-        <p:nvSpPr>
-          <p:cNvPr id="25" name="Shape 23"/>
-          <p:cNvSpPr/>
-          <p:nvPr/>
-        </p:nvSpPr>
-        <p:spPr>
-          <a:xfrm>
-            <a:off x="365760" y="3273552"/>
-            <a:ext cx="1371600" cy="658368"/>
+              <a:t>Syllables</a:t>
+            </a:r>
+            <a:endParaRPr lang="en-US" sz="1100" dirty="0"/>
+          </a:p>
+        </p:txBody>
+      </p:sp>
+      <p:sp>
+        <p:nvSpPr>
+          <p:cNvPr id="24" name="Shape 22"/>
+          <p:cNvSpPr/>
+          <p:nvPr/>
+        </p:nvSpPr>
+        <p:spPr>
+          <a:xfrm>
+            <a:off x="1874520" y="3273552"/>
+            <a:ext cx="6903720" cy="658368"/>
           </a:xfrm>
           <a:prstGeom prst="rect">
             <a:avLst>
@@ -20564,11 +20208,38 @@
             </a:avLst>
           </a:prstGeom>
           <a:solidFill>
-            <a:srgbClr val="E2E8F0"/>
-          </a:solidFill>
-          <a:ln w="12700">
-            <a:solidFill>
-              <a:srgbClr val="E2E8F0"/>
+            <a:srgbClr val="CCFBF1"/>
+          </a:solidFill>
+          <a:ln w="12700">
+            <a:solidFill>
+              <a:srgbClr val="0D9488"/>
+            </a:solidFill>
+            <a:prstDash val="solid"/>
+          </a:ln>
+        </p:spPr>
+      </p:sp>
+      <p:sp>
+        <p:nvSpPr>
+          <p:cNvPr id="25" name="Shape 23"/>
+          <p:cNvSpPr/>
+          <p:nvPr/>
+        </p:nvSpPr>
+        <p:spPr>
+          <a:xfrm>
+            <a:off x="2999232" y="3364992"/>
+            <a:ext cx="1645920" cy="475488"/>
+          </a:xfrm>
+          <a:prstGeom prst="rect">
+            <a:avLst>
+              <a:gd name="adj" fmla="val 9615"/>
+            </a:avLst>
+          </a:prstGeom>
+          <a:solidFill>
+            <a:srgbClr val="FFFFFF"/>
+          </a:solidFill>
+          <a:ln w="12700">
+            <a:solidFill>
+              <a:srgbClr val="0D9488"/>
             </a:solidFill>
             <a:prstDash val="solid"/>
           </a:ln>
@@ -20582,8 +20253,8 @@
         </p:nvSpPr>
         <p:spPr>
           <a:xfrm>
-            <a:off x="365760" y="3273552"/>
-            <a:ext cx="1371600" cy="658368"/>
+            <a:off x="2999232" y="3364992"/>
+            <a:ext cx="1645920" cy="475488"/>
           </a:xfrm>
           <a:prstGeom prst="rect">
             <a:avLst/>
@@ -20599,46 +20270,58 @@
               <a:buNone/>
             </a:pPr>
             <a:r>
-              <a:rPr lang="en-US" sz="1100" b="1" dirty="0">
-                <a:solidFill>
-                  <a:srgbClr val="475569"/>
+              <a:rPr lang="en-US" sz="1400" b="1" dirty="0">
+                <a:solidFill>
+                  <a:srgbClr val="0D9488"/>
                 </a:solidFill>
                 <a:latin typeface="Trebuchet MS" pitchFamily="34" charset="0"/>
                 <a:ea typeface="Trebuchet MS" pitchFamily="34" charset="-122"/>
                 <a:cs typeface="Trebuchet MS" pitchFamily="34" charset="-120"/>
               </a:rPr>
-              <a:t>Syllables</a:t>
-            </a:r>
-            <a:endParaRPr lang="en-US" sz="1100" dirty="0"/>
-          </a:p>
-        </p:txBody>
-      </p:sp>
-      <p:sp>
-        <p:nvSpPr>
-          <p:cNvPr id="27" name="Shape 25"/>
-          <p:cNvSpPr/>
-          <p:nvPr/>
-        </p:nvSpPr>
-        <p:spPr>
-          <a:xfrm>
-            <a:off x="1874520" y="3273552"/>
-            <a:ext cx="6903720" cy="658368"/>
-          </a:xfrm>
-          <a:prstGeom prst="rect">
-            <a:avLst>
-              <a:gd name="adj" fmla="val 8333"/>
-            </a:avLst>
-          </a:prstGeom>
-          <a:solidFill>
-            <a:srgbClr val="CCFBF1"/>
-          </a:solidFill>
-          <a:ln w="12700">
-            <a:solidFill>
-              <a:srgbClr val="0D9488"/>
-            </a:solidFill>
-            <a:prstDash val="solid"/>
-          </a:ln>
-        </p:spPr>
+              <a:t>re</a:t>
+            </a:r>
+            <a:endParaRPr lang="en-US" sz="1400" dirty="0"/>
+          </a:p>
+        </p:txBody>
+      </p:sp>
+      <p:sp>
+        <p:nvSpPr>
+          <p:cNvPr id="27" name="Text 25"/>
+          <p:cNvSpPr/>
+          <p:nvPr/>
+        </p:nvSpPr>
+        <p:spPr>
+          <a:xfrm>
+            <a:off x="4645152" y="3364992"/>
+            <a:ext cx="1097280" cy="475488"/>
+          </a:xfrm>
+          <a:prstGeom prst="rect">
+            <a:avLst/>
+          </a:prstGeom>
+          <a:noFill/>
+          <a:ln/>
+        </p:spPr>
+        <p:txBody>
+          <a:bodyPr wrap="square" lIns="0" tIns="0" rIns="0" bIns="0" rtlCol="0" anchor="ctr"/>
+          <a:lstStyle/>
+          <a:p>
+            <a:pPr algn="ctr" indent="0" marL="0">
+              <a:buNone/>
+            </a:pPr>
+            <a:r>
+              <a:rPr lang="en-US" sz="1600" b="1" dirty="0">
+                <a:solidFill>
+                  <a:srgbClr val="0D9488"/>
+                </a:solidFill>
+                <a:latin typeface="Trebuchet MS" pitchFamily="34" charset="0"/>
+                <a:ea typeface="Trebuchet MS" pitchFamily="34" charset="-122"/>
+                <a:cs typeface="Trebuchet MS" pitchFamily="34" charset="-120"/>
+              </a:rPr>
+              <a:t>·</a:t>
+            </a:r>
+            <a:endParaRPr lang="en-US" sz="1600" dirty="0"/>
+          </a:p>
+        </p:txBody>
       </p:sp>
       <p:sp>
         <p:nvSpPr>
@@ -20648,7 +20331,7 @@
         </p:nvSpPr>
         <p:spPr>
           <a:xfrm>
-            <a:off x="2313432" y="3364992"/>
+            <a:off x="5742432" y="3364992"/>
             <a:ext cx="1645920" cy="475488"/>
           </a:xfrm>
           <a:prstGeom prst="rect">
@@ -20675,7 +20358,7 @@
         </p:nvSpPr>
         <p:spPr>
           <a:xfrm>
-            <a:off x="2313432" y="3364992"/>
+            <a:off x="5742432" y="3364992"/>
             <a:ext cx="1645920" cy="475488"/>
           </a:xfrm>
           <a:prstGeom prst="rect">
@@ -20700,7 +20383,7 @@
                 <a:ea typeface="Trebuchet MS" pitchFamily="34" charset="-122"/>
                 <a:cs typeface="Trebuchet MS" pitchFamily="34" charset="-120"/>
               </a:rPr>
-              <a:t>re</a:t>
+              <a:t>build</a:t>
             </a:r>
             <a:endParaRPr lang="en-US" sz="1400" dirty="0"/>
           </a:p>
@@ -20708,14 +20391,41 @@
       </p:sp>
       <p:sp>
         <p:nvSpPr>
-          <p:cNvPr id="30" name="Text 28"/>
-          <p:cNvSpPr/>
-          <p:nvPr/>
-        </p:nvSpPr>
-        <p:spPr>
-          <a:xfrm>
-            <a:off x="3959352" y="3364992"/>
-            <a:ext cx="411480" cy="475488"/>
+          <p:cNvPr id="30" name="Shape 28"/>
+          <p:cNvSpPr/>
+          <p:nvPr/>
+        </p:nvSpPr>
+        <p:spPr>
+          <a:xfrm>
+            <a:off x="365760" y="4096512"/>
+            <a:ext cx="1371600" cy="804672"/>
+          </a:xfrm>
+          <a:prstGeom prst="rect">
+            <a:avLst>
+              <a:gd name="adj" fmla="val 6818"/>
+            </a:avLst>
+          </a:prstGeom>
+          <a:solidFill>
+            <a:srgbClr val="E2E8F0"/>
+          </a:solidFill>
+          <a:ln w="12700">
+            <a:solidFill>
+              <a:srgbClr val="E2E8F0"/>
+            </a:solidFill>
+            <a:prstDash val="solid"/>
+          </a:ln>
+        </p:spPr>
+      </p:sp>
+      <p:sp>
+        <p:nvSpPr>
+          <p:cNvPr id="31" name="Text 29"/>
+          <p:cNvSpPr/>
+          <p:nvPr/>
+        </p:nvSpPr>
+        <p:spPr>
+          <a:xfrm>
+            <a:off x="365760" y="4096512"/>
+            <a:ext cx="1371600" cy="804672"/>
           </a:xfrm>
           <a:prstGeom prst="rect">
             <a:avLst/>
@@ -20731,201 +20441,30 @@
               <a:buNone/>
             </a:pPr>
             <a:r>
-              <a:rPr lang="en-US" sz="1600" b="1" dirty="0">
-                <a:solidFill>
-                  <a:srgbClr val="0D9488"/>
+              <a:rPr lang="en-US" sz="1100" b="1" dirty="0">
+                <a:solidFill>
+                  <a:srgbClr val="475569"/>
                 </a:solidFill>
                 <a:latin typeface="Trebuchet MS" pitchFamily="34" charset="0"/>
                 <a:ea typeface="Trebuchet MS" pitchFamily="34" charset="-122"/>
                 <a:cs typeface="Trebuchet MS" pitchFamily="34" charset="-120"/>
               </a:rPr>
-              <a:t>·</a:t>
-            </a:r>
-            <a:endParaRPr lang="en-US" sz="1600" dirty="0"/>
-          </a:p>
-        </p:txBody>
-      </p:sp>
-      <p:sp>
-        <p:nvSpPr>
-          <p:cNvPr id="31" name="Shape 29"/>
-          <p:cNvSpPr/>
-          <p:nvPr/>
-        </p:nvSpPr>
-        <p:spPr>
-          <a:xfrm>
-            <a:off x="4370832" y="3364992"/>
-            <a:ext cx="1645920" cy="475488"/>
-          </a:xfrm>
-          <a:prstGeom prst="rect">
-            <a:avLst>
-              <a:gd name="adj" fmla="val 9615"/>
-            </a:avLst>
-          </a:prstGeom>
-          <a:solidFill>
-            <a:srgbClr val="FFFFFF"/>
-          </a:solidFill>
-          <a:ln w="12700">
-            <a:solidFill>
-              <a:srgbClr val="0D9488"/>
-            </a:solidFill>
-            <a:prstDash val="solid"/>
-          </a:ln>
-        </p:spPr>
-      </p:sp>
-      <p:sp>
-        <p:nvSpPr>
-          <p:cNvPr id="32" name="Text 30"/>
-          <p:cNvSpPr/>
-          <p:nvPr/>
-        </p:nvSpPr>
-        <p:spPr>
-          <a:xfrm>
-            <a:off x="4370832" y="3364992"/>
-            <a:ext cx="1645920" cy="475488"/>
-          </a:xfrm>
-          <a:prstGeom prst="rect">
-            <a:avLst/>
-          </a:prstGeom>
-          <a:noFill/>
-          <a:ln/>
-        </p:spPr>
-        <p:txBody>
-          <a:bodyPr wrap="square" lIns="0" tIns="0" rIns="0" bIns="0" rtlCol="0" anchor="ctr"/>
-          <a:lstStyle/>
-          <a:p>
-            <a:pPr algn="ctr" indent="0" marL="0">
-              <a:buNone/>
-            </a:pPr>
-            <a:r>
-              <a:rPr lang="en-US" sz="1400" b="1" dirty="0">
-                <a:solidFill>
-                  <a:srgbClr val="0D9488"/>
-                </a:solidFill>
-                <a:latin typeface="Trebuchet MS" pitchFamily="34" charset="0"/>
-                <a:ea typeface="Trebuchet MS" pitchFamily="34" charset="-122"/>
-                <a:cs typeface="Trebuchet MS" pitchFamily="34" charset="-120"/>
-              </a:rPr>
-              <a:t>view</a:t>
-            </a:r>
-            <a:endParaRPr lang="en-US" sz="1400" dirty="0"/>
-          </a:p>
-        </p:txBody>
-      </p:sp>
-      <p:sp>
-        <p:nvSpPr>
-          <p:cNvPr id="33" name="Text 31"/>
-          <p:cNvSpPr/>
-          <p:nvPr/>
-        </p:nvSpPr>
-        <p:spPr>
-          <a:xfrm>
-            <a:off x="6016752" y="3364992"/>
-            <a:ext cx="411480" cy="475488"/>
-          </a:xfrm>
-          <a:prstGeom prst="rect">
-            <a:avLst/>
-          </a:prstGeom>
-          <a:noFill/>
-          <a:ln/>
-        </p:spPr>
-        <p:txBody>
-          <a:bodyPr wrap="square" lIns="0" tIns="0" rIns="0" bIns="0" rtlCol="0" anchor="ctr"/>
-          <a:lstStyle/>
-          <a:p>
-            <a:pPr algn="ctr" indent="0" marL="0">
-              <a:buNone/>
-            </a:pPr>
-            <a:r>
-              <a:rPr lang="en-US" sz="1600" b="1" dirty="0">
-                <a:solidFill>
-                  <a:srgbClr val="0D9488"/>
-                </a:solidFill>
-                <a:latin typeface="Trebuchet MS" pitchFamily="34" charset="0"/>
-                <a:ea typeface="Trebuchet MS" pitchFamily="34" charset="-122"/>
-                <a:cs typeface="Trebuchet MS" pitchFamily="34" charset="-120"/>
-              </a:rPr>
-              <a:t>·</a:t>
-            </a:r>
-            <a:endParaRPr lang="en-US" sz="1600" dirty="0"/>
-          </a:p>
-        </p:txBody>
-      </p:sp>
-      <p:sp>
-        <p:nvSpPr>
-          <p:cNvPr id="34" name="Shape 32"/>
-          <p:cNvSpPr/>
-          <p:nvPr/>
-        </p:nvSpPr>
-        <p:spPr>
-          <a:xfrm>
-            <a:off x="6428232" y="3364992"/>
-            <a:ext cx="1645920" cy="475488"/>
-          </a:xfrm>
-          <a:prstGeom prst="rect">
-            <a:avLst>
-              <a:gd name="adj" fmla="val 9615"/>
-            </a:avLst>
-          </a:prstGeom>
-          <a:solidFill>
-            <a:srgbClr val="FFFFFF"/>
-          </a:solidFill>
-          <a:ln w="12700">
-            <a:solidFill>
-              <a:srgbClr val="0D9488"/>
-            </a:solidFill>
-            <a:prstDash val="solid"/>
-          </a:ln>
-        </p:spPr>
-      </p:sp>
-      <p:sp>
-        <p:nvSpPr>
-          <p:cNvPr id="35" name="Text 33"/>
-          <p:cNvSpPr/>
-          <p:nvPr/>
-        </p:nvSpPr>
-        <p:spPr>
-          <a:xfrm>
-            <a:off x="6428232" y="3364992"/>
-            <a:ext cx="1645920" cy="475488"/>
-          </a:xfrm>
-          <a:prstGeom prst="rect">
-            <a:avLst/>
-          </a:prstGeom>
-          <a:noFill/>
-          <a:ln/>
-        </p:spPr>
-        <p:txBody>
-          <a:bodyPr wrap="square" lIns="0" tIns="0" rIns="0" bIns="0" rtlCol="0" anchor="ctr"/>
-          <a:lstStyle/>
-          <a:p>
-            <a:pPr algn="ctr" indent="0" marL="0">
-              <a:buNone/>
-            </a:pPr>
-            <a:r>
-              <a:rPr lang="en-US" sz="1400" b="1" dirty="0">
-                <a:solidFill>
-                  <a:srgbClr val="0D9488"/>
-                </a:solidFill>
-                <a:latin typeface="Trebuchet MS" pitchFamily="34" charset="0"/>
-                <a:ea typeface="Trebuchet MS" pitchFamily="34" charset="-122"/>
-                <a:cs typeface="Trebuchet MS" pitchFamily="34" charset="-120"/>
-              </a:rPr>
-              <a:t>ing</a:t>
-            </a:r>
-            <a:endParaRPr lang="en-US" sz="1400" dirty="0"/>
-          </a:p>
-        </p:txBody>
-      </p:sp>
-      <p:sp>
-        <p:nvSpPr>
-          <p:cNvPr id="36" name="Shape 34"/>
-          <p:cNvSpPr/>
-          <p:nvPr/>
-        </p:nvSpPr>
-        <p:spPr>
-          <a:xfrm>
-            <a:off x="365760" y="4096512"/>
-            <a:ext cx="1371600" cy="804672"/>
+              <a:t>Phonemes</a:t>
+            </a:r>
+            <a:endParaRPr lang="en-US" sz="1100" dirty="0"/>
+          </a:p>
+        </p:txBody>
+      </p:sp>
+      <p:sp>
+        <p:nvSpPr>
+          <p:cNvPr id="32" name="Shape 30"/>
+          <p:cNvSpPr/>
+          <p:nvPr/>
+        </p:nvSpPr>
+        <p:spPr>
+          <a:xfrm>
+            <a:off x="1874520" y="4096512"/>
+            <a:ext cx="6903720" cy="804672"/>
           </a:xfrm>
           <a:prstGeom prst="rect">
             <a:avLst>
@@ -20933,85 +20472,19 @@
             </a:avLst>
           </a:prstGeom>
           <a:solidFill>
-            <a:srgbClr val="E2E8F0"/>
+            <a:srgbClr val="F8FAFC"/>
           </a:solidFill>
           <a:ln w="12700">
             <a:solidFill>
               <a:srgbClr val="E2E8F0"/>
             </a:solidFill>
-            <a:prstDash val="solid"/>
-          </a:ln>
-        </p:spPr>
-      </p:sp>
-      <p:sp>
-        <p:nvSpPr>
-          <p:cNvPr id="37" name="Text 35"/>
-          <p:cNvSpPr/>
-          <p:nvPr/>
-        </p:nvSpPr>
-        <p:spPr>
-          <a:xfrm>
-            <a:off x="365760" y="4096512"/>
-            <a:ext cx="1371600" cy="804672"/>
-          </a:xfrm>
-          <a:prstGeom prst="rect">
-            <a:avLst/>
-          </a:prstGeom>
-          <a:noFill/>
-          <a:ln/>
-        </p:spPr>
-        <p:txBody>
-          <a:bodyPr wrap="square" lIns="0" tIns="0" rIns="0" bIns="0" rtlCol="0" anchor="ctr"/>
-          <a:lstStyle/>
-          <a:p>
-            <a:pPr algn="ctr" indent="0" marL="0">
-              <a:buNone/>
-            </a:pPr>
-            <a:r>
-              <a:rPr lang="en-US" sz="1100" b="1" dirty="0">
-                <a:solidFill>
-                  <a:srgbClr val="475569"/>
-                </a:solidFill>
-                <a:latin typeface="Trebuchet MS" pitchFamily="34" charset="0"/>
-                <a:ea typeface="Trebuchet MS" pitchFamily="34" charset="-122"/>
-                <a:cs typeface="Trebuchet MS" pitchFamily="34" charset="-120"/>
-              </a:rPr>
-              <a:t>Phonemes</a:t>
-            </a:r>
-            <a:endParaRPr lang="en-US" sz="1100" dirty="0"/>
-          </a:p>
-        </p:txBody>
-      </p:sp>
-      <p:sp>
-        <p:nvSpPr>
-          <p:cNvPr id="38" name="Shape 36"/>
-          <p:cNvSpPr/>
-          <p:nvPr/>
-        </p:nvSpPr>
-        <p:spPr>
-          <a:xfrm>
-            <a:off x="1874520" y="4096512"/>
-            <a:ext cx="6903720" cy="804672"/>
-          </a:xfrm>
-          <a:prstGeom prst="rect">
-            <a:avLst>
-              <a:gd name="adj" fmla="val 6818"/>
-            </a:avLst>
-          </a:prstGeom>
-          <a:solidFill>
-            <a:srgbClr val="F8FAFC"/>
-          </a:solidFill>
-          <a:ln w="12700">
-            <a:solidFill>
-              <a:srgbClr val="E2E8F0"/>
-            </a:solidFill>
             <a:prstDash val="dash"/>
           </a:ln>
         </p:spPr>
       </p:sp>
       <p:sp>
         <p:nvSpPr>
-          <p:cNvPr id="39" name="Text 37"/>
+          <p:cNvPr id="33" name="Text 31"/>
           <p:cNvSpPr/>
           <p:nvPr/>
         </p:nvSpPr>
@@ -21473,7 +20946,7 @@
                 <a:ea typeface="Trebuchet MS" pitchFamily="34" charset="-122"/>
                 <a:cs typeface="Trebuchet MS" pitchFamily="34" charset="-120"/>
               </a:rPr>
-              <a:t>reviewing</a:t>
+              <a:t>rebuild</a:t>
             </a:r>
             <a:endParaRPr lang="en-US" sz="2800" dirty="0"/>
           </a:p>
@@ -21553,7 +21026,7 @@
         </p:nvSpPr>
         <p:spPr>
           <a:xfrm>
-            <a:off x="2221992" y="2258568"/>
+            <a:off x="2938272" y="2258568"/>
             <a:ext cx="1828800" cy="292608"/>
           </a:xfrm>
           <a:prstGeom prst="rect">
@@ -21587,7 +21060,7 @@
         </p:nvSpPr>
         <p:spPr>
           <a:xfrm>
-            <a:off x="2221992" y="2258568"/>
+            <a:off x="2938272" y="2258568"/>
             <a:ext cx="1828800" cy="292608"/>
           </a:xfrm>
           <a:prstGeom prst="rect">
@@ -21626,7 +21099,7 @@
         </p:nvSpPr>
         <p:spPr>
           <a:xfrm>
-            <a:off x="2221992" y="2569464"/>
+            <a:off x="2938272" y="2569464"/>
             <a:ext cx="1828800" cy="201168"/>
           </a:xfrm>
           <a:prstGeom prst="rect">
@@ -21665,7 +21138,7 @@
         </p:nvSpPr>
         <p:spPr>
           <a:xfrm>
-            <a:off x="4370832" y="2258568"/>
+            <a:off x="5803392" y="2258568"/>
             <a:ext cx="1828800" cy="292608"/>
           </a:xfrm>
           <a:prstGeom prst="rect">
@@ -21699,7 +21172,7 @@
         </p:nvSpPr>
         <p:spPr>
           <a:xfrm>
-            <a:off x="4370832" y="2258568"/>
+            <a:off x="5803392" y="2258568"/>
             <a:ext cx="1828800" cy="292608"/>
           </a:xfrm>
           <a:prstGeom prst="rect">
@@ -21724,7 +21197,7 @@
                 <a:ea typeface="Trebuchet MS" pitchFamily="34" charset="-122"/>
                 <a:cs typeface="Trebuchet MS" pitchFamily="34" charset="-120"/>
               </a:rPr>
-              <a:t>view</a:t>
+              <a:t>build</a:t>
             </a:r>
             <a:endParaRPr lang="en-US" sz="1300" dirty="0"/>
           </a:p>
@@ -21738,7 +21211,7 @@
         </p:nvSpPr>
         <p:spPr>
           <a:xfrm>
-            <a:off x="4370832" y="2569464"/>
+            <a:off x="5803392" y="2569464"/>
             <a:ext cx="1828800" cy="201168"/>
           </a:xfrm>
           <a:prstGeom prst="rect">
@@ -21763,7 +21236,7 @@
                 <a:ea typeface="Calibri" pitchFamily="34" charset="-122"/>
                 <a:cs typeface="Calibri" pitchFamily="34" charset="-120"/>
               </a:rPr>
-              <a:t>to look at</a:t>
+              <a:t>to construct or make</a:t>
             </a:r>
             <a:endParaRPr lang="en-US" sz="850" dirty="0"/>
           </a:p>
@@ -21777,30 +21250,23 @@
         </p:nvSpPr>
         <p:spPr>
           <a:xfrm>
-            <a:off x="6519672" y="2258568"/>
-            <a:ext cx="1828800" cy="292608"/>
+            <a:off x="365760" y="3273552"/>
+            <a:ext cx="1371600" cy="658368"/>
           </a:xfrm>
           <a:prstGeom prst="rect">
             <a:avLst>
-              <a:gd name="adj" fmla="val 25000"/>
+              <a:gd name="adj" fmla="val 8333"/>
             </a:avLst>
           </a:prstGeom>
           <a:solidFill>
-            <a:srgbClr val="FCE7F3"/>
-          </a:solidFill>
-          <a:ln w="19050">
-            <a:solidFill>
-              <a:srgbClr val="DB2777"/>
-            </a:solidFill>
-            <a:prstDash val="solid"/>
-          </a:ln>
-          <a:effectLst>
-            <a:outerShdw sx="100000" sy="100000" kx="0" ky="0" algn="bl" rotWithShape="0" blurRad="101600" dist="38100" dir="8100000">
-              <a:srgbClr val="000000">
-                <a:alpha val="12000"/>
-              </a:srgbClr>
-            </a:outerShdw>
-          </a:effectLst>
+            <a:srgbClr val="E2E8F0"/>
+          </a:solidFill>
+          <a:ln w="12700">
+            <a:solidFill>
+              <a:srgbClr val="E2E8F0"/>
+            </a:solidFill>
+            <a:prstDash val="solid"/>
+          </a:ln>
         </p:spPr>
       </p:sp>
       <p:sp>
@@ -21811,8 +21277,8 @@
         </p:nvSpPr>
         <p:spPr>
           <a:xfrm>
-            <a:off x="6519672" y="2258568"/>
-            <a:ext cx="1828800" cy="292608"/>
+            <a:off x="365760" y="3273552"/>
+            <a:ext cx="1371600" cy="658368"/>
           </a:xfrm>
           <a:prstGeom prst="rect">
             <a:avLst/>
@@ -21828,30 +21294,585 @@
               <a:buNone/>
             </a:pPr>
             <a:r>
-              <a:rPr lang="en-US" sz="1300" b="1" dirty="0">
-                <a:solidFill>
-                  <a:srgbClr val="9D174D"/>
+              <a:rPr lang="en-US" sz="1100" b="1" dirty="0">
+                <a:solidFill>
+                  <a:srgbClr val="475569"/>
                 </a:solidFill>
                 <a:latin typeface="Trebuchet MS" pitchFamily="34" charset="0"/>
                 <a:ea typeface="Trebuchet MS" pitchFamily="34" charset="-122"/>
                 <a:cs typeface="Trebuchet MS" pitchFamily="34" charset="-120"/>
               </a:rPr>
-              <a:t>ing</a:t>
-            </a:r>
-            <a:endParaRPr lang="en-US" sz="1300" dirty="0"/>
-          </a:p>
-        </p:txBody>
-      </p:sp>
-      <p:sp>
-        <p:nvSpPr>
-          <p:cNvPr id="24" name="Text 22"/>
-          <p:cNvSpPr/>
-          <p:nvPr/>
-        </p:nvSpPr>
-        <p:spPr>
-          <a:xfrm>
-            <a:off x="6519672" y="2569464"/>
-            <a:ext cx="1828800" cy="201168"/>
+              <a:t>Syllables</a:t>
+            </a:r>
+            <a:endParaRPr lang="en-US" sz="1100" dirty="0"/>
+          </a:p>
+        </p:txBody>
+      </p:sp>
+      <p:sp>
+        <p:nvSpPr>
+          <p:cNvPr id="24" name="Shape 22"/>
+          <p:cNvSpPr/>
+          <p:nvPr/>
+        </p:nvSpPr>
+        <p:spPr>
+          <a:xfrm>
+            <a:off x="1874520" y="3273552"/>
+            <a:ext cx="6903720" cy="658368"/>
+          </a:xfrm>
+          <a:prstGeom prst="rect">
+            <a:avLst>
+              <a:gd name="adj" fmla="val 8333"/>
+            </a:avLst>
+          </a:prstGeom>
+          <a:solidFill>
+            <a:srgbClr val="CCFBF1"/>
+          </a:solidFill>
+          <a:ln w="12700">
+            <a:solidFill>
+              <a:srgbClr val="0D9488"/>
+            </a:solidFill>
+            <a:prstDash val="solid"/>
+          </a:ln>
+        </p:spPr>
+      </p:sp>
+      <p:sp>
+        <p:nvSpPr>
+          <p:cNvPr id="25" name="Shape 23"/>
+          <p:cNvSpPr/>
+          <p:nvPr/>
+        </p:nvSpPr>
+        <p:spPr>
+          <a:xfrm>
+            <a:off x="2999232" y="3364992"/>
+            <a:ext cx="1645920" cy="475488"/>
+          </a:xfrm>
+          <a:prstGeom prst="rect">
+            <a:avLst>
+              <a:gd name="adj" fmla="val 9615"/>
+            </a:avLst>
+          </a:prstGeom>
+          <a:solidFill>
+            <a:srgbClr val="FFFFFF"/>
+          </a:solidFill>
+          <a:ln w="12700">
+            <a:solidFill>
+              <a:srgbClr val="0D9488"/>
+            </a:solidFill>
+            <a:prstDash val="solid"/>
+          </a:ln>
+        </p:spPr>
+      </p:sp>
+      <p:sp>
+        <p:nvSpPr>
+          <p:cNvPr id="26" name="Text 24"/>
+          <p:cNvSpPr/>
+          <p:nvPr/>
+        </p:nvSpPr>
+        <p:spPr>
+          <a:xfrm>
+            <a:off x="2999232" y="3364992"/>
+            <a:ext cx="1645920" cy="475488"/>
+          </a:xfrm>
+          <a:prstGeom prst="rect">
+            <a:avLst/>
+          </a:prstGeom>
+          <a:noFill/>
+          <a:ln/>
+        </p:spPr>
+        <p:txBody>
+          <a:bodyPr wrap="square" lIns="0" tIns="0" rIns="0" bIns="0" rtlCol="0" anchor="ctr"/>
+          <a:lstStyle/>
+          <a:p>
+            <a:pPr algn="ctr" indent="0" marL="0">
+              <a:buNone/>
+            </a:pPr>
+            <a:r>
+              <a:rPr lang="en-US" sz="1400" b="1" dirty="0">
+                <a:solidFill>
+                  <a:srgbClr val="0D9488"/>
+                </a:solidFill>
+                <a:latin typeface="Trebuchet MS" pitchFamily="34" charset="0"/>
+                <a:ea typeface="Trebuchet MS" pitchFamily="34" charset="-122"/>
+                <a:cs typeface="Trebuchet MS" pitchFamily="34" charset="-120"/>
+              </a:rPr>
+              <a:t>re</a:t>
+            </a:r>
+            <a:endParaRPr lang="en-US" sz="1400" dirty="0"/>
+          </a:p>
+        </p:txBody>
+      </p:sp>
+      <p:sp>
+        <p:nvSpPr>
+          <p:cNvPr id="27" name="Text 25"/>
+          <p:cNvSpPr/>
+          <p:nvPr/>
+        </p:nvSpPr>
+        <p:spPr>
+          <a:xfrm>
+            <a:off x="4645152" y="3364992"/>
+            <a:ext cx="1097280" cy="475488"/>
+          </a:xfrm>
+          <a:prstGeom prst="rect">
+            <a:avLst/>
+          </a:prstGeom>
+          <a:noFill/>
+          <a:ln/>
+        </p:spPr>
+        <p:txBody>
+          <a:bodyPr wrap="square" lIns="0" tIns="0" rIns="0" bIns="0" rtlCol="0" anchor="ctr"/>
+          <a:lstStyle/>
+          <a:p>
+            <a:pPr algn="ctr" indent="0" marL="0">
+              <a:buNone/>
+            </a:pPr>
+            <a:r>
+              <a:rPr lang="en-US" sz="1600" b="1" dirty="0">
+                <a:solidFill>
+                  <a:srgbClr val="0D9488"/>
+                </a:solidFill>
+                <a:latin typeface="Trebuchet MS" pitchFamily="34" charset="0"/>
+                <a:ea typeface="Trebuchet MS" pitchFamily="34" charset="-122"/>
+                <a:cs typeface="Trebuchet MS" pitchFamily="34" charset="-120"/>
+              </a:rPr>
+              <a:t>·</a:t>
+            </a:r>
+            <a:endParaRPr lang="en-US" sz="1600" dirty="0"/>
+          </a:p>
+        </p:txBody>
+      </p:sp>
+      <p:sp>
+        <p:nvSpPr>
+          <p:cNvPr id="28" name="Shape 26"/>
+          <p:cNvSpPr/>
+          <p:nvPr/>
+        </p:nvSpPr>
+        <p:spPr>
+          <a:xfrm>
+            <a:off x="5742432" y="3364992"/>
+            <a:ext cx="1645920" cy="475488"/>
+          </a:xfrm>
+          <a:prstGeom prst="rect">
+            <a:avLst>
+              <a:gd name="adj" fmla="val 9615"/>
+            </a:avLst>
+          </a:prstGeom>
+          <a:solidFill>
+            <a:srgbClr val="FFFFFF"/>
+          </a:solidFill>
+          <a:ln w="12700">
+            <a:solidFill>
+              <a:srgbClr val="0D9488"/>
+            </a:solidFill>
+            <a:prstDash val="solid"/>
+          </a:ln>
+        </p:spPr>
+      </p:sp>
+      <p:sp>
+        <p:nvSpPr>
+          <p:cNvPr id="29" name="Text 27"/>
+          <p:cNvSpPr/>
+          <p:nvPr/>
+        </p:nvSpPr>
+        <p:spPr>
+          <a:xfrm>
+            <a:off x="5742432" y="3364992"/>
+            <a:ext cx="1645920" cy="475488"/>
+          </a:xfrm>
+          <a:prstGeom prst="rect">
+            <a:avLst/>
+          </a:prstGeom>
+          <a:noFill/>
+          <a:ln/>
+        </p:spPr>
+        <p:txBody>
+          <a:bodyPr wrap="square" lIns="0" tIns="0" rIns="0" bIns="0" rtlCol="0" anchor="ctr"/>
+          <a:lstStyle/>
+          <a:p>
+            <a:pPr algn="ctr" indent="0" marL="0">
+              <a:buNone/>
+            </a:pPr>
+            <a:r>
+              <a:rPr lang="en-US" sz="1400" b="1" dirty="0">
+                <a:solidFill>
+                  <a:srgbClr val="0D9488"/>
+                </a:solidFill>
+                <a:latin typeface="Trebuchet MS" pitchFamily="34" charset="0"/>
+                <a:ea typeface="Trebuchet MS" pitchFamily="34" charset="-122"/>
+                <a:cs typeface="Trebuchet MS" pitchFamily="34" charset="-120"/>
+              </a:rPr>
+              <a:t>build</a:t>
+            </a:r>
+            <a:endParaRPr lang="en-US" sz="1400" dirty="0"/>
+          </a:p>
+        </p:txBody>
+      </p:sp>
+      <p:sp>
+        <p:nvSpPr>
+          <p:cNvPr id="30" name="Shape 28"/>
+          <p:cNvSpPr/>
+          <p:nvPr/>
+        </p:nvSpPr>
+        <p:spPr>
+          <a:xfrm>
+            <a:off x="365760" y="4096512"/>
+            <a:ext cx="1371600" cy="804672"/>
+          </a:xfrm>
+          <a:prstGeom prst="rect">
+            <a:avLst>
+              <a:gd name="adj" fmla="val 6818"/>
+            </a:avLst>
+          </a:prstGeom>
+          <a:solidFill>
+            <a:srgbClr val="E2E8F0"/>
+          </a:solidFill>
+          <a:ln w="12700">
+            <a:solidFill>
+              <a:srgbClr val="E2E8F0"/>
+            </a:solidFill>
+            <a:prstDash val="solid"/>
+          </a:ln>
+        </p:spPr>
+      </p:sp>
+      <p:sp>
+        <p:nvSpPr>
+          <p:cNvPr id="31" name="Text 29"/>
+          <p:cNvSpPr/>
+          <p:nvPr/>
+        </p:nvSpPr>
+        <p:spPr>
+          <a:xfrm>
+            <a:off x="365760" y="4096512"/>
+            <a:ext cx="1371600" cy="804672"/>
+          </a:xfrm>
+          <a:prstGeom prst="rect">
+            <a:avLst/>
+          </a:prstGeom>
+          <a:noFill/>
+          <a:ln/>
+        </p:spPr>
+        <p:txBody>
+          <a:bodyPr wrap="square" lIns="0" tIns="0" rIns="0" bIns="0" rtlCol="0" anchor="ctr"/>
+          <a:lstStyle/>
+          <a:p>
+            <a:pPr algn="ctr" indent="0" marL="0">
+              <a:buNone/>
+            </a:pPr>
+            <a:r>
+              <a:rPr lang="en-US" sz="1100" b="1" dirty="0">
+                <a:solidFill>
+                  <a:srgbClr val="475569"/>
+                </a:solidFill>
+                <a:latin typeface="Trebuchet MS" pitchFamily="34" charset="0"/>
+                <a:ea typeface="Trebuchet MS" pitchFamily="34" charset="-122"/>
+                <a:cs typeface="Trebuchet MS" pitchFamily="34" charset="-120"/>
+              </a:rPr>
+              <a:t>Phonemes</a:t>
+            </a:r>
+            <a:endParaRPr lang="en-US" sz="1100" dirty="0"/>
+          </a:p>
+        </p:txBody>
+      </p:sp>
+      <p:sp>
+        <p:nvSpPr>
+          <p:cNvPr id="32" name="Shape 30"/>
+          <p:cNvSpPr/>
+          <p:nvPr/>
+        </p:nvSpPr>
+        <p:spPr>
+          <a:xfrm>
+            <a:off x="1874520" y="4096512"/>
+            <a:ext cx="6903720" cy="804672"/>
+          </a:xfrm>
+          <a:prstGeom prst="rect">
+            <a:avLst>
+              <a:gd name="adj" fmla="val 6818"/>
+            </a:avLst>
+          </a:prstGeom>
+          <a:solidFill>
+            <a:srgbClr val="FCE7F3"/>
+          </a:solidFill>
+          <a:ln w="12700">
+            <a:solidFill>
+              <a:srgbClr val="DB2777"/>
+            </a:solidFill>
+            <a:prstDash val="solid"/>
+          </a:ln>
+        </p:spPr>
+      </p:sp>
+      <p:sp>
+        <p:nvSpPr>
+          <p:cNvPr id="33" name="Shape 31"/>
+          <p:cNvSpPr/>
+          <p:nvPr/>
+        </p:nvSpPr>
+        <p:spPr>
+          <a:xfrm>
+            <a:off x="2254649" y="4169664"/>
+            <a:ext cx="685800" cy="384048"/>
+          </a:xfrm>
+          <a:prstGeom prst="rect">
+            <a:avLst>
+              <a:gd name="adj" fmla="val 9524"/>
+            </a:avLst>
+          </a:prstGeom>
+          <a:solidFill>
+            <a:srgbClr val="FFFFFF"/>
+          </a:solidFill>
+          <a:ln w="12700">
+            <a:solidFill>
+              <a:srgbClr val="DB2777"/>
+            </a:solidFill>
+            <a:prstDash val="solid"/>
+          </a:ln>
+        </p:spPr>
+      </p:sp>
+      <p:sp>
+        <p:nvSpPr>
+          <p:cNvPr id="34" name="Text 32"/>
+          <p:cNvSpPr/>
+          <p:nvPr/>
+        </p:nvSpPr>
+        <p:spPr>
+          <a:xfrm>
+            <a:off x="2254649" y="4169664"/>
+            <a:ext cx="685800" cy="384048"/>
+          </a:xfrm>
+          <a:prstGeom prst="rect">
+            <a:avLst/>
+          </a:prstGeom>
+          <a:noFill/>
+          <a:ln/>
+        </p:spPr>
+        <p:txBody>
+          <a:bodyPr wrap="square" lIns="0" tIns="0" rIns="0" bIns="0" rtlCol="0" anchor="ctr"/>
+          <a:lstStyle/>
+          <a:p>
+            <a:pPr algn="ctr" indent="0" marL="0">
+              <a:buNone/>
+            </a:pPr>
+            <a:r>
+              <a:rPr lang="en-US" sz="900" b="1" dirty="0">
+                <a:solidFill>
+                  <a:srgbClr val="9D174D"/>
+                </a:solidFill>
+                <a:latin typeface="Trebuchet MS" pitchFamily="34" charset="0"/>
+                <a:ea typeface="Trebuchet MS" pitchFamily="34" charset="-122"/>
+                <a:cs typeface="Trebuchet MS" pitchFamily="34" charset="-120"/>
+              </a:rPr>
+              <a:t>r</a:t>
+            </a:r>
+            <a:endParaRPr lang="en-US" sz="900" dirty="0"/>
+          </a:p>
+        </p:txBody>
+      </p:sp>
+      <p:sp>
+        <p:nvSpPr>
+          <p:cNvPr id="35" name="Shape 33"/>
+          <p:cNvSpPr/>
+          <p:nvPr/>
+        </p:nvSpPr>
+        <p:spPr>
+          <a:xfrm>
+            <a:off x="3293146" y="4169664"/>
+            <a:ext cx="685800" cy="384048"/>
+          </a:xfrm>
+          <a:prstGeom prst="rect">
+            <a:avLst>
+              <a:gd name="adj" fmla="val 9524"/>
+            </a:avLst>
+          </a:prstGeom>
+          <a:solidFill>
+            <a:srgbClr val="FFFFFF"/>
+          </a:solidFill>
+          <a:ln w="12700">
+            <a:solidFill>
+              <a:srgbClr val="DB2777"/>
+            </a:solidFill>
+            <a:prstDash val="solid"/>
+          </a:ln>
+        </p:spPr>
+      </p:sp>
+      <p:sp>
+        <p:nvSpPr>
+          <p:cNvPr id="36" name="Text 34"/>
+          <p:cNvSpPr/>
+          <p:nvPr/>
+        </p:nvSpPr>
+        <p:spPr>
+          <a:xfrm>
+            <a:off x="3293146" y="4169664"/>
+            <a:ext cx="685800" cy="384048"/>
+          </a:xfrm>
+          <a:prstGeom prst="rect">
+            <a:avLst/>
+          </a:prstGeom>
+          <a:noFill/>
+          <a:ln/>
+        </p:spPr>
+        <p:txBody>
+          <a:bodyPr wrap="square" lIns="0" tIns="0" rIns="0" bIns="0" rtlCol="0" anchor="ctr"/>
+          <a:lstStyle/>
+          <a:p>
+            <a:pPr algn="ctr" indent="0" marL="0">
+              <a:buNone/>
+            </a:pPr>
+            <a:r>
+              <a:rPr lang="en-US" sz="900" b="1" dirty="0">
+                <a:solidFill>
+                  <a:srgbClr val="9D174D"/>
+                </a:solidFill>
+                <a:latin typeface="Trebuchet MS" pitchFamily="34" charset="0"/>
+                <a:ea typeface="Trebuchet MS" pitchFamily="34" charset="-122"/>
+                <a:cs typeface="Trebuchet MS" pitchFamily="34" charset="-120"/>
+              </a:rPr>
+              <a:t>e</a:t>
+            </a:r>
+            <a:endParaRPr lang="en-US" sz="900" dirty="0"/>
+          </a:p>
+        </p:txBody>
+      </p:sp>
+      <p:sp>
+        <p:nvSpPr>
+          <p:cNvPr id="37" name="Shape 35"/>
+          <p:cNvSpPr/>
+          <p:nvPr/>
+        </p:nvSpPr>
+        <p:spPr>
+          <a:xfrm>
+            <a:off x="4331643" y="4169664"/>
+            <a:ext cx="685800" cy="384048"/>
+          </a:xfrm>
+          <a:prstGeom prst="rect">
+            <a:avLst>
+              <a:gd name="adj" fmla="val 9524"/>
+            </a:avLst>
+          </a:prstGeom>
+          <a:solidFill>
+            <a:srgbClr val="FFFFFF"/>
+          </a:solidFill>
+          <a:ln w="12700">
+            <a:solidFill>
+              <a:srgbClr val="DB2777"/>
+            </a:solidFill>
+            <a:prstDash val="solid"/>
+          </a:ln>
+        </p:spPr>
+      </p:sp>
+      <p:sp>
+        <p:nvSpPr>
+          <p:cNvPr id="38" name="Text 36"/>
+          <p:cNvSpPr/>
+          <p:nvPr/>
+        </p:nvSpPr>
+        <p:spPr>
+          <a:xfrm>
+            <a:off x="4331643" y="4169664"/>
+            <a:ext cx="685800" cy="384048"/>
+          </a:xfrm>
+          <a:prstGeom prst="rect">
+            <a:avLst/>
+          </a:prstGeom>
+          <a:noFill/>
+          <a:ln/>
+        </p:spPr>
+        <p:txBody>
+          <a:bodyPr wrap="square" lIns="0" tIns="0" rIns="0" bIns="0" rtlCol="0" anchor="ctr"/>
+          <a:lstStyle/>
+          <a:p>
+            <a:pPr algn="ctr" indent="0" marL="0">
+              <a:buNone/>
+            </a:pPr>
+            <a:r>
+              <a:rPr lang="en-US" sz="900" b="1" dirty="0">
+                <a:solidFill>
+                  <a:srgbClr val="9D174D"/>
+                </a:solidFill>
+                <a:latin typeface="Trebuchet MS" pitchFamily="34" charset="0"/>
+                <a:ea typeface="Trebuchet MS" pitchFamily="34" charset="-122"/>
+                <a:cs typeface="Trebuchet MS" pitchFamily="34" charset="-120"/>
+              </a:rPr>
+              <a:t>b</a:t>
+            </a:r>
+            <a:endParaRPr lang="en-US" sz="900" dirty="0"/>
+          </a:p>
+        </p:txBody>
+      </p:sp>
+      <p:sp>
+        <p:nvSpPr>
+          <p:cNvPr id="39" name="Shape 37"/>
+          <p:cNvSpPr/>
+          <p:nvPr/>
+        </p:nvSpPr>
+        <p:spPr>
+          <a:xfrm>
+            <a:off x="5370141" y="4169664"/>
+            <a:ext cx="685800" cy="384048"/>
+          </a:xfrm>
+          <a:prstGeom prst="rect">
+            <a:avLst>
+              <a:gd name="adj" fmla="val 9524"/>
+            </a:avLst>
+          </a:prstGeom>
+          <a:solidFill>
+            <a:srgbClr val="FFFFFF"/>
+          </a:solidFill>
+          <a:ln w="12700">
+            <a:solidFill>
+              <a:srgbClr val="DB2777"/>
+            </a:solidFill>
+            <a:prstDash val="solid"/>
+          </a:ln>
+        </p:spPr>
+      </p:sp>
+      <p:sp>
+        <p:nvSpPr>
+          <p:cNvPr id="40" name="Text 38"/>
+          <p:cNvSpPr/>
+          <p:nvPr/>
+        </p:nvSpPr>
+        <p:spPr>
+          <a:xfrm>
+            <a:off x="5370141" y="4169664"/>
+            <a:ext cx="685800" cy="384048"/>
+          </a:xfrm>
+          <a:prstGeom prst="rect">
+            <a:avLst/>
+          </a:prstGeom>
+          <a:noFill/>
+          <a:ln/>
+        </p:spPr>
+        <p:txBody>
+          <a:bodyPr wrap="square" lIns="0" tIns="0" rIns="0" bIns="0" rtlCol="0" anchor="ctr"/>
+          <a:lstStyle/>
+          <a:p>
+            <a:pPr algn="ctr" indent="0" marL="0">
+              <a:buNone/>
+            </a:pPr>
+            <a:r>
+              <a:rPr lang="en-US" sz="900" b="1" dirty="0">
+                <a:solidFill>
+                  <a:srgbClr val="9D174D"/>
+                </a:solidFill>
+                <a:latin typeface="Trebuchet MS" pitchFamily="34" charset="0"/>
+                <a:ea typeface="Trebuchet MS" pitchFamily="34" charset="-122"/>
+                <a:cs typeface="Trebuchet MS" pitchFamily="34" charset="-120"/>
+              </a:rPr>
+              <a:t>ui</a:t>
+            </a:r>
+            <a:endParaRPr lang="en-US" sz="900" dirty="0"/>
+          </a:p>
+        </p:txBody>
+      </p:sp>
+      <p:sp>
+        <p:nvSpPr>
+          <p:cNvPr id="41" name="Text 39"/>
+          <p:cNvSpPr/>
+          <p:nvPr/>
+        </p:nvSpPr>
+        <p:spPr>
+          <a:xfrm>
+            <a:off x="5370141" y="4572000"/>
+            <a:ext cx="685800" cy="219456"/>
           </a:xfrm>
           <a:prstGeom prst="rect">
             <a:avLst/>
@@ -21867,57 +21888,57 @@
               <a:buNone/>
             </a:pPr>
             <a:r>
-              <a:rPr lang="en-US" sz="850" dirty="0">
-                <a:solidFill>
-                  <a:srgbClr val="475569"/>
+              <a:rPr lang="en-US" sz="750" i="1" dirty="0">
+                <a:solidFill>
+                  <a:srgbClr val="94A3B8"/>
                 </a:solidFill>
                 <a:latin typeface="Calibri" pitchFamily="34" charset="0"/>
                 <a:ea typeface="Calibri" pitchFamily="34" charset="-122"/>
                 <a:cs typeface="Calibri" pitchFamily="34" charset="-120"/>
               </a:rPr>
-              <a:t>ongoing action</a:t>
-            </a:r>
-            <a:endParaRPr lang="en-US" sz="850" dirty="0"/>
-          </a:p>
-        </p:txBody>
-      </p:sp>
-      <p:sp>
-        <p:nvSpPr>
-          <p:cNvPr id="25" name="Shape 23"/>
-          <p:cNvSpPr/>
-          <p:nvPr/>
-        </p:nvSpPr>
-        <p:spPr>
-          <a:xfrm>
-            <a:off x="365760" y="3273552"/>
-            <a:ext cx="1371600" cy="658368"/>
+              <a:t>/i/</a:t>
+            </a:r>
+            <a:endParaRPr lang="en-US" sz="750" dirty="0"/>
+          </a:p>
+        </p:txBody>
+      </p:sp>
+      <p:sp>
+        <p:nvSpPr>
+          <p:cNvPr id="42" name="Shape 40"/>
+          <p:cNvSpPr/>
+          <p:nvPr/>
+        </p:nvSpPr>
+        <p:spPr>
+          <a:xfrm>
+            <a:off x="6408638" y="4169664"/>
+            <a:ext cx="685800" cy="384048"/>
           </a:xfrm>
           <a:prstGeom prst="rect">
             <a:avLst>
-              <a:gd name="adj" fmla="val 8333"/>
+              <a:gd name="adj" fmla="val 9524"/>
             </a:avLst>
           </a:prstGeom>
           <a:solidFill>
-            <a:srgbClr val="E2E8F0"/>
-          </a:solidFill>
-          <a:ln w="12700">
-            <a:solidFill>
-              <a:srgbClr val="E2E8F0"/>
-            </a:solidFill>
-            <a:prstDash val="solid"/>
-          </a:ln>
-        </p:spPr>
-      </p:sp>
-      <p:sp>
-        <p:nvSpPr>
-          <p:cNvPr id="26" name="Text 24"/>
-          <p:cNvSpPr/>
-          <p:nvPr/>
-        </p:nvSpPr>
-        <p:spPr>
-          <a:xfrm>
-            <a:off x="365760" y="3273552"/>
-            <a:ext cx="1371600" cy="658368"/>
+            <a:srgbClr val="FFFFFF"/>
+          </a:solidFill>
+          <a:ln w="12700">
+            <a:solidFill>
+              <a:srgbClr val="DB2777"/>
+            </a:solidFill>
+            <a:prstDash val="solid"/>
+          </a:ln>
+        </p:spPr>
+      </p:sp>
+      <p:sp>
+        <p:nvSpPr>
+          <p:cNvPr id="43" name="Text 41"/>
+          <p:cNvSpPr/>
+          <p:nvPr/>
+        </p:nvSpPr>
+        <p:spPr>
+          <a:xfrm>
+            <a:off x="6408638" y="4169664"/>
+            <a:ext cx="685800" cy="384048"/>
           </a:xfrm>
           <a:prstGeom prst="rect">
             <a:avLst/>
@@ -21933,84 +21954,57 @@
               <a:buNone/>
             </a:pPr>
             <a:r>
-              <a:rPr lang="en-US" sz="1100" b="1" dirty="0">
-                <a:solidFill>
-                  <a:srgbClr val="475569"/>
+              <a:rPr lang="en-US" sz="900" b="1" dirty="0">
+                <a:solidFill>
+                  <a:srgbClr val="9D174D"/>
                 </a:solidFill>
                 <a:latin typeface="Trebuchet MS" pitchFamily="34" charset="0"/>
                 <a:ea typeface="Trebuchet MS" pitchFamily="34" charset="-122"/>
                 <a:cs typeface="Trebuchet MS" pitchFamily="34" charset="-120"/>
               </a:rPr>
-              <a:t>Syllables</a:t>
-            </a:r>
-            <a:endParaRPr lang="en-US" sz="1100" dirty="0"/>
-          </a:p>
-        </p:txBody>
-      </p:sp>
-      <p:sp>
-        <p:nvSpPr>
-          <p:cNvPr id="27" name="Shape 25"/>
-          <p:cNvSpPr/>
-          <p:nvPr/>
-        </p:nvSpPr>
-        <p:spPr>
-          <a:xfrm>
-            <a:off x="1874520" y="3273552"/>
-            <a:ext cx="6903720" cy="658368"/>
+              <a:t>l</a:t>
+            </a:r>
+            <a:endParaRPr lang="en-US" sz="900" dirty="0"/>
+          </a:p>
+        </p:txBody>
+      </p:sp>
+      <p:sp>
+        <p:nvSpPr>
+          <p:cNvPr id="44" name="Shape 42"/>
+          <p:cNvSpPr/>
+          <p:nvPr/>
+        </p:nvSpPr>
+        <p:spPr>
+          <a:xfrm>
+            <a:off x="7447135" y="4169664"/>
+            <a:ext cx="685800" cy="384048"/>
           </a:xfrm>
           <a:prstGeom prst="rect">
             <a:avLst>
-              <a:gd name="adj" fmla="val 8333"/>
+              <a:gd name="adj" fmla="val 9524"/>
             </a:avLst>
           </a:prstGeom>
           <a:solidFill>
-            <a:srgbClr val="CCFBF1"/>
-          </a:solidFill>
-          <a:ln w="12700">
-            <a:solidFill>
-              <a:srgbClr val="0D9488"/>
-            </a:solidFill>
-            <a:prstDash val="solid"/>
-          </a:ln>
-        </p:spPr>
-      </p:sp>
-      <p:sp>
-        <p:nvSpPr>
-          <p:cNvPr id="28" name="Shape 26"/>
-          <p:cNvSpPr/>
-          <p:nvPr/>
-        </p:nvSpPr>
-        <p:spPr>
-          <a:xfrm>
-            <a:off x="2313432" y="3364992"/>
-            <a:ext cx="1645920" cy="475488"/>
-          </a:xfrm>
-          <a:prstGeom prst="rect">
-            <a:avLst>
-              <a:gd name="adj" fmla="val 9615"/>
-            </a:avLst>
-          </a:prstGeom>
-          <a:solidFill>
             <a:srgbClr val="FFFFFF"/>
           </a:solidFill>
           <a:ln w="12700">
             <a:solidFill>
-              <a:srgbClr val="0D9488"/>
-            </a:solidFill>
-            <a:prstDash val="solid"/>
-          </a:ln>
-        </p:spPr>
-      </p:sp>
-      <p:sp>
-        <p:nvSpPr>
-          <p:cNvPr id="29" name="Text 27"/>
-          <p:cNvSpPr/>
-          <p:nvPr/>
-        </p:nvSpPr>
-        <p:spPr>
-          <a:xfrm>
-            <a:off x="2313432" y="3364992"/>
-            <a:ext cx="1645920" cy="475488"/>
+              <a:srgbClr val="DB2777"/>
+            </a:solidFill>
+            <a:prstDash val="solid"/>
+          </a:ln>
+        </p:spPr>
+      </p:sp>
+      <p:sp>
+        <p:nvSpPr>
+          <p:cNvPr id="45" name="Text 43"/>
+          <p:cNvSpPr/>
+          <p:nvPr/>
+        </p:nvSpPr>
+        <p:spPr>
+          <a:xfrm>
+            <a:off x="7447135" y="4169664"/>
+            <a:ext cx="685800" cy="384048"/>
           </a:xfrm>
           <a:prstGeom prst="rect">
             <a:avLst/>
@@ -22026,753 +22020,15 @@
               <a:buNone/>
             </a:pPr>
             <a:r>
-              <a:rPr lang="en-US" sz="1400" b="1" dirty="0">
-                <a:solidFill>
-                  <a:srgbClr val="0D9488"/>
+              <a:rPr lang="en-US" sz="900" b="1" dirty="0">
+                <a:solidFill>
+                  <a:srgbClr val="9D174D"/>
                 </a:solidFill>
                 <a:latin typeface="Trebuchet MS" pitchFamily="34" charset="0"/>
                 <a:ea typeface="Trebuchet MS" pitchFamily="34" charset="-122"/>
                 <a:cs typeface="Trebuchet MS" pitchFamily="34" charset="-120"/>
               </a:rPr>
-              <a:t>re</a:t>
-            </a:r>
-            <a:endParaRPr lang="en-US" sz="1400" dirty="0"/>
-          </a:p>
-        </p:txBody>
-      </p:sp>
-      <p:sp>
-        <p:nvSpPr>
-          <p:cNvPr id="30" name="Text 28"/>
-          <p:cNvSpPr/>
-          <p:nvPr/>
-        </p:nvSpPr>
-        <p:spPr>
-          <a:xfrm>
-            <a:off x="3959352" y="3364992"/>
-            <a:ext cx="411480" cy="475488"/>
-          </a:xfrm>
-          <a:prstGeom prst="rect">
-            <a:avLst/>
-          </a:prstGeom>
-          <a:noFill/>
-          <a:ln/>
-        </p:spPr>
-        <p:txBody>
-          <a:bodyPr wrap="square" lIns="0" tIns="0" rIns="0" bIns="0" rtlCol="0" anchor="ctr"/>
-          <a:lstStyle/>
-          <a:p>
-            <a:pPr algn="ctr" indent="0" marL="0">
-              <a:buNone/>
-            </a:pPr>
-            <a:r>
-              <a:rPr lang="en-US" sz="1600" b="1" dirty="0">
-                <a:solidFill>
-                  <a:srgbClr val="0D9488"/>
-                </a:solidFill>
-                <a:latin typeface="Trebuchet MS" pitchFamily="34" charset="0"/>
-                <a:ea typeface="Trebuchet MS" pitchFamily="34" charset="-122"/>
-                <a:cs typeface="Trebuchet MS" pitchFamily="34" charset="-120"/>
-              </a:rPr>
-              <a:t>·</a:t>
-            </a:r>
-            <a:endParaRPr lang="en-US" sz="1600" dirty="0"/>
-          </a:p>
-        </p:txBody>
-      </p:sp>
-      <p:sp>
-        <p:nvSpPr>
-          <p:cNvPr id="31" name="Shape 29"/>
-          <p:cNvSpPr/>
-          <p:nvPr/>
-        </p:nvSpPr>
-        <p:spPr>
-          <a:xfrm>
-            <a:off x="4370832" y="3364992"/>
-            <a:ext cx="1645920" cy="475488"/>
-          </a:xfrm>
-          <a:prstGeom prst="rect">
-            <a:avLst>
-              <a:gd name="adj" fmla="val 9615"/>
-            </a:avLst>
-          </a:prstGeom>
-          <a:solidFill>
-            <a:srgbClr val="FFFFFF"/>
-          </a:solidFill>
-          <a:ln w="12700">
-            <a:solidFill>
-              <a:srgbClr val="0D9488"/>
-            </a:solidFill>
-            <a:prstDash val="solid"/>
-          </a:ln>
-        </p:spPr>
-      </p:sp>
-      <p:sp>
-        <p:nvSpPr>
-          <p:cNvPr id="32" name="Text 30"/>
-          <p:cNvSpPr/>
-          <p:nvPr/>
-        </p:nvSpPr>
-        <p:spPr>
-          <a:xfrm>
-            <a:off x="4370832" y="3364992"/>
-            <a:ext cx="1645920" cy="475488"/>
-          </a:xfrm>
-          <a:prstGeom prst="rect">
-            <a:avLst/>
-          </a:prstGeom>
-          <a:noFill/>
-          <a:ln/>
-        </p:spPr>
-        <p:txBody>
-          <a:bodyPr wrap="square" lIns="0" tIns="0" rIns="0" bIns="0" rtlCol="0" anchor="ctr"/>
-          <a:lstStyle/>
-          <a:p>
-            <a:pPr algn="ctr" indent="0" marL="0">
-              <a:buNone/>
-            </a:pPr>
-            <a:r>
-              <a:rPr lang="en-US" sz="1400" b="1" dirty="0">
-                <a:solidFill>
-                  <a:srgbClr val="0D9488"/>
-                </a:solidFill>
-                <a:latin typeface="Trebuchet MS" pitchFamily="34" charset="0"/>
-                <a:ea typeface="Trebuchet MS" pitchFamily="34" charset="-122"/>
-                <a:cs typeface="Trebuchet MS" pitchFamily="34" charset="-120"/>
-              </a:rPr>
-              <a:t>view</a:t>
-            </a:r>
-            <a:endParaRPr lang="en-US" sz="1400" dirty="0"/>
-          </a:p>
-        </p:txBody>
-      </p:sp>
-      <p:sp>
-        <p:nvSpPr>
-          <p:cNvPr id="33" name="Text 31"/>
-          <p:cNvSpPr/>
-          <p:nvPr/>
-        </p:nvSpPr>
-        <p:spPr>
-          <a:xfrm>
-            <a:off x="6016752" y="3364992"/>
-            <a:ext cx="411480" cy="475488"/>
-          </a:xfrm>
-          <a:prstGeom prst="rect">
-            <a:avLst/>
-          </a:prstGeom>
-          <a:noFill/>
-          <a:ln/>
-        </p:spPr>
-        <p:txBody>
-          <a:bodyPr wrap="square" lIns="0" tIns="0" rIns="0" bIns="0" rtlCol="0" anchor="ctr"/>
-          <a:lstStyle/>
-          <a:p>
-            <a:pPr algn="ctr" indent="0" marL="0">
-              <a:buNone/>
-            </a:pPr>
-            <a:r>
-              <a:rPr lang="en-US" sz="1600" b="1" dirty="0">
-                <a:solidFill>
-                  <a:srgbClr val="0D9488"/>
-                </a:solidFill>
-                <a:latin typeface="Trebuchet MS" pitchFamily="34" charset="0"/>
-                <a:ea typeface="Trebuchet MS" pitchFamily="34" charset="-122"/>
-                <a:cs typeface="Trebuchet MS" pitchFamily="34" charset="-120"/>
-              </a:rPr>
-              <a:t>·</a:t>
-            </a:r>
-            <a:endParaRPr lang="en-US" sz="1600" dirty="0"/>
-          </a:p>
-        </p:txBody>
-      </p:sp>
-      <p:sp>
-        <p:nvSpPr>
-          <p:cNvPr id="34" name="Shape 32"/>
-          <p:cNvSpPr/>
-          <p:nvPr/>
-        </p:nvSpPr>
-        <p:spPr>
-          <a:xfrm>
-            <a:off x="6428232" y="3364992"/>
-            <a:ext cx="1645920" cy="475488"/>
-          </a:xfrm>
-          <a:prstGeom prst="rect">
-            <a:avLst>
-              <a:gd name="adj" fmla="val 9615"/>
-            </a:avLst>
-          </a:prstGeom>
-          <a:solidFill>
-            <a:srgbClr val="FFFFFF"/>
-          </a:solidFill>
-          <a:ln w="12700">
-            <a:solidFill>
-              <a:srgbClr val="0D9488"/>
-            </a:solidFill>
-            <a:prstDash val="solid"/>
-          </a:ln>
-        </p:spPr>
-      </p:sp>
-      <p:sp>
-        <p:nvSpPr>
-          <p:cNvPr id="35" name="Text 33"/>
-          <p:cNvSpPr/>
-          <p:nvPr/>
-        </p:nvSpPr>
-        <p:spPr>
-          <a:xfrm>
-            <a:off x="6428232" y="3364992"/>
-            <a:ext cx="1645920" cy="475488"/>
-          </a:xfrm>
-          <a:prstGeom prst="rect">
-            <a:avLst/>
-          </a:prstGeom>
-          <a:noFill/>
-          <a:ln/>
-        </p:spPr>
-        <p:txBody>
-          <a:bodyPr wrap="square" lIns="0" tIns="0" rIns="0" bIns="0" rtlCol="0" anchor="ctr"/>
-          <a:lstStyle/>
-          <a:p>
-            <a:pPr algn="ctr" indent="0" marL="0">
-              <a:buNone/>
-            </a:pPr>
-            <a:r>
-              <a:rPr lang="en-US" sz="1400" b="1" dirty="0">
-                <a:solidFill>
-                  <a:srgbClr val="0D9488"/>
-                </a:solidFill>
-                <a:latin typeface="Trebuchet MS" pitchFamily="34" charset="0"/>
-                <a:ea typeface="Trebuchet MS" pitchFamily="34" charset="-122"/>
-                <a:cs typeface="Trebuchet MS" pitchFamily="34" charset="-120"/>
-              </a:rPr>
-              <a:t>ing</a:t>
-            </a:r>
-            <a:endParaRPr lang="en-US" sz="1400" dirty="0"/>
-          </a:p>
-        </p:txBody>
-      </p:sp>
-      <p:sp>
-        <p:nvSpPr>
-          <p:cNvPr id="36" name="Shape 34"/>
-          <p:cNvSpPr/>
-          <p:nvPr/>
-        </p:nvSpPr>
-        <p:spPr>
-          <a:xfrm>
-            <a:off x="365760" y="4096512"/>
-            <a:ext cx="1371600" cy="804672"/>
-          </a:xfrm>
-          <a:prstGeom prst="rect">
-            <a:avLst>
-              <a:gd name="adj" fmla="val 6818"/>
-            </a:avLst>
-          </a:prstGeom>
-          <a:solidFill>
-            <a:srgbClr val="E2E8F0"/>
-          </a:solidFill>
-          <a:ln w="12700">
-            <a:solidFill>
-              <a:srgbClr val="E2E8F0"/>
-            </a:solidFill>
-            <a:prstDash val="solid"/>
-          </a:ln>
-        </p:spPr>
-      </p:sp>
-      <p:sp>
-        <p:nvSpPr>
-          <p:cNvPr id="37" name="Text 35"/>
-          <p:cNvSpPr/>
-          <p:nvPr/>
-        </p:nvSpPr>
-        <p:spPr>
-          <a:xfrm>
-            <a:off x="365760" y="4096512"/>
-            <a:ext cx="1371600" cy="804672"/>
-          </a:xfrm>
-          <a:prstGeom prst="rect">
-            <a:avLst/>
-          </a:prstGeom>
-          <a:noFill/>
-          <a:ln/>
-        </p:spPr>
-        <p:txBody>
-          <a:bodyPr wrap="square" lIns="0" tIns="0" rIns="0" bIns="0" rtlCol="0" anchor="ctr"/>
-          <a:lstStyle/>
-          <a:p>
-            <a:pPr algn="ctr" indent="0" marL="0">
-              <a:buNone/>
-            </a:pPr>
-            <a:r>
-              <a:rPr lang="en-US" sz="1100" b="1" dirty="0">
-                <a:solidFill>
-                  <a:srgbClr val="475569"/>
-                </a:solidFill>
-                <a:latin typeface="Trebuchet MS" pitchFamily="34" charset="0"/>
-                <a:ea typeface="Trebuchet MS" pitchFamily="34" charset="-122"/>
-                <a:cs typeface="Trebuchet MS" pitchFamily="34" charset="-120"/>
-              </a:rPr>
-              <a:t>Phonemes</a:t>
-            </a:r>
-            <a:endParaRPr lang="en-US" sz="1100" dirty="0"/>
-          </a:p>
-        </p:txBody>
-      </p:sp>
-      <p:sp>
-        <p:nvSpPr>
-          <p:cNvPr id="38" name="Shape 36"/>
-          <p:cNvSpPr/>
-          <p:nvPr/>
-        </p:nvSpPr>
-        <p:spPr>
-          <a:xfrm>
-            <a:off x="1874520" y="4096512"/>
-            <a:ext cx="6903720" cy="804672"/>
-          </a:xfrm>
-          <a:prstGeom prst="rect">
-            <a:avLst>
-              <a:gd name="adj" fmla="val 6818"/>
-            </a:avLst>
-          </a:prstGeom>
-          <a:solidFill>
-            <a:srgbClr val="FCE7F3"/>
-          </a:solidFill>
-          <a:ln w="12700">
-            <a:solidFill>
-              <a:srgbClr val="DB2777"/>
-            </a:solidFill>
-            <a:prstDash val="solid"/>
-          </a:ln>
-        </p:spPr>
-      </p:sp>
-      <p:sp>
-        <p:nvSpPr>
-          <p:cNvPr id="39" name="Shape 37"/>
-          <p:cNvSpPr/>
-          <p:nvPr/>
-        </p:nvSpPr>
-        <p:spPr>
-          <a:xfrm>
-            <a:off x="2254649" y="4169664"/>
-            <a:ext cx="685800" cy="384048"/>
-          </a:xfrm>
-          <a:prstGeom prst="rect">
-            <a:avLst>
-              <a:gd name="adj" fmla="val 9524"/>
-            </a:avLst>
-          </a:prstGeom>
-          <a:solidFill>
-            <a:srgbClr val="FFFFFF"/>
-          </a:solidFill>
-          <a:ln w="12700">
-            <a:solidFill>
-              <a:srgbClr val="DB2777"/>
-            </a:solidFill>
-            <a:prstDash val="solid"/>
-          </a:ln>
-        </p:spPr>
-      </p:sp>
-      <p:sp>
-        <p:nvSpPr>
-          <p:cNvPr id="40" name="Text 38"/>
-          <p:cNvSpPr/>
-          <p:nvPr/>
-        </p:nvSpPr>
-        <p:spPr>
-          <a:xfrm>
-            <a:off x="2254649" y="4169664"/>
-            <a:ext cx="685800" cy="384048"/>
-          </a:xfrm>
-          <a:prstGeom prst="rect">
-            <a:avLst/>
-          </a:prstGeom>
-          <a:noFill/>
-          <a:ln/>
-        </p:spPr>
-        <p:txBody>
-          <a:bodyPr wrap="square" lIns="0" tIns="0" rIns="0" bIns="0" rtlCol="0" anchor="ctr"/>
-          <a:lstStyle/>
-          <a:p>
-            <a:pPr algn="ctr" indent="0" marL="0">
-              <a:buNone/>
-            </a:pPr>
-            <a:r>
-              <a:rPr lang="en-US" sz="900" b="1" dirty="0">
-                <a:solidFill>
-                  <a:srgbClr val="9D174D"/>
-                </a:solidFill>
-                <a:latin typeface="Trebuchet MS" pitchFamily="34" charset="0"/>
-                <a:ea typeface="Trebuchet MS" pitchFamily="34" charset="-122"/>
-                <a:cs typeface="Trebuchet MS" pitchFamily="34" charset="-120"/>
-              </a:rPr>
-              <a:t>r</a:t>
-            </a:r>
-            <a:endParaRPr lang="en-US" sz="900" dirty="0"/>
-          </a:p>
-        </p:txBody>
-      </p:sp>
-      <p:sp>
-        <p:nvSpPr>
-          <p:cNvPr id="41" name="Shape 39"/>
-          <p:cNvSpPr/>
-          <p:nvPr/>
-        </p:nvSpPr>
-        <p:spPr>
-          <a:xfrm>
-            <a:off x="3293146" y="4169664"/>
-            <a:ext cx="685800" cy="384048"/>
-          </a:xfrm>
-          <a:prstGeom prst="rect">
-            <a:avLst>
-              <a:gd name="adj" fmla="val 9524"/>
-            </a:avLst>
-          </a:prstGeom>
-          <a:solidFill>
-            <a:srgbClr val="FFFFFF"/>
-          </a:solidFill>
-          <a:ln w="12700">
-            <a:solidFill>
-              <a:srgbClr val="DB2777"/>
-            </a:solidFill>
-            <a:prstDash val="solid"/>
-          </a:ln>
-        </p:spPr>
-      </p:sp>
-      <p:sp>
-        <p:nvSpPr>
-          <p:cNvPr id="42" name="Text 40"/>
-          <p:cNvSpPr/>
-          <p:nvPr/>
-        </p:nvSpPr>
-        <p:spPr>
-          <a:xfrm>
-            <a:off x="3293146" y="4169664"/>
-            <a:ext cx="685800" cy="384048"/>
-          </a:xfrm>
-          <a:prstGeom prst="rect">
-            <a:avLst/>
-          </a:prstGeom>
-          <a:noFill/>
-          <a:ln/>
-        </p:spPr>
-        <p:txBody>
-          <a:bodyPr wrap="square" lIns="0" tIns="0" rIns="0" bIns="0" rtlCol="0" anchor="ctr"/>
-          <a:lstStyle/>
-          <a:p>
-            <a:pPr algn="ctr" indent="0" marL="0">
-              <a:buNone/>
-            </a:pPr>
-            <a:r>
-              <a:rPr lang="en-US" sz="900" b="1" dirty="0">
-                <a:solidFill>
-                  <a:srgbClr val="9D174D"/>
-                </a:solidFill>
-                <a:latin typeface="Trebuchet MS" pitchFamily="34" charset="0"/>
-                <a:ea typeface="Trebuchet MS" pitchFamily="34" charset="-122"/>
-                <a:cs typeface="Trebuchet MS" pitchFamily="34" charset="-120"/>
-              </a:rPr>
-              <a:t>e</a:t>
-            </a:r>
-            <a:endParaRPr lang="en-US" sz="900" dirty="0"/>
-          </a:p>
-        </p:txBody>
-      </p:sp>
-      <p:sp>
-        <p:nvSpPr>
-          <p:cNvPr id="43" name="Shape 41"/>
-          <p:cNvSpPr/>
-          <p:nvPr/>
-        </p:nvSpPr>
-        <p:spPr>
-          <a:xfrm>
-            <a:off x="4331643" y="4169664"/>
-            <a:ext cx="685800" cy="384048"/>
-          </a:xfrm>
-          <a:prstGeom prst="rect">
-            <a:avLst>
-              <a:gd name="adj" fmla="val 9524"/>
-            </a:avLst>
-          </a:prstGeom>
-          <a:solidFill>
-            <a:srgbClr val="FFFFFF"/>
-          </a:solidFill>
-          <a:ln w="12700">
-            <a:solidFill>
-              <a:srgbClr val="DB2777"/>
-            </a:solidFill>
-            <a:prstDash val="solid"/>
-          </a:ln>
-        </p:spPr>
-      </p:sp>
-      <p:sp>
-        <p:nvSpPr>
-          <p:cNvPr id="44" name="Text 42"/>
-          <p:cNvSpPr/>
-          <p:nvPr/>
-        </p:nvSpPr>
-        <p:spPr>
-          <a:xfrm>
-            <a:off x="4331643" y="4169664"/>
-            <a:ext cx="685800" cy="384048"/>
-          </a:xfrm>
-          <a:prstGeom prst="rect">
-            <a:avLst/>
-          </a:prstGeom>
-          <a:noFill/>
-          <a:ln/>
-        </p:spPr>
-        <p:txBody>
-          <a:bodyPr wrap="square" lIns="0" tIns="0" rIns="0" bIns="0" rtlCol="0" anchor="ctr"/>
-          <a:lstStyle/>
-          <a:p>
-            <a:pPr algn="ctr" indent="0" marL="0">
-              <a:buNone/>
-            </a:pPr>
-            <a:r>
-              <a:rPr lang="en-US" sz="900" b="1" dirty="0">
-                <a:solidFill>
-                  <a:srgbClr val="9D174D"/>
-                </a:solidFill>
-                <a:latin typeface="Trebuchet MS" pitchFamily="34" charset="0"/>
-                <a:ea typeface="Trebuchet MS" pitchFamily="34" charset="-122"/>
-                <a:cs typeface="Trebuchet MS" pitchFamily="34" charset="-120"/>
-              </a:rPr>
-              <a:t>v</a:t>
-            </a:r>
-            <a:endParaRPr lang="en-US" sz="900" dirty="0"/>
-          </a:p>
-        </p:txBody>
-      </p:sp>
-      <p:sp>
-        <p:nvSpPr>
-          <p:cNvPr id="45" name="Shape 43"/>
-          <p:cNvSpPr/>
-          <p:nvPr/>
-        </p:nvSpPr>
-        <p:spPr>
-          <a:xfrm>
-            <a:off x="5370141" y="4169664"/>
-            <a:ext cx="685800" cy="384048"/>
-          </a:xfrm>
-          <a:prstGeom prst="rect">
-            <a:avLst>
-              <a:gd name="adj" fmla="val 9524"/>
-            </a:avLst>
-          </a:prstGeom>
-          <a:solidFill>
-            <a:srgbClr val="FFFFFF"/>
-          </a:solidFill>
-          <a:ln w="12700">
-            <a:solidFill>
-              <a:srgbClr val="DB2777"/>
-            </a:solidFill>
-            <a:prstDash val="solid"/>
-          </a:ln>
-        </p:spPr>
-      </p:sp>
-      <p:sp>
-        <p:nvSpPr>
-          <p:cNvPr id="46" name="Text 44"/>
-          <p:cNvSpPr/>
-          <p:nvPr/>
-        </p:nvSpPr>
-        <p:spPr>
-          <a:xfrm>
-            <a:off x="5370141" y="4169664"/>
-            <a:ext cx="685800" cy="384048"/>
-          </a:xfrm>
-          <a:prstGeom prst="rect">
-            <a:avLst/>
-          </a:prstGeom>
-          <a:noFill/>
-          <a:ln/>
-        </p:spPr>
-        <p:txBody>
-          <a:bodyPr wrap="square" lIns="0" tIns="0" rIns="0" bIns="0" rtlCol="0" anchor="ctr"/>
-          <a:lstStyle/>
-          <a:p>
-            <a:pPr algn="ctr" indent="0" marL="0">
-              <a:buNone/>
-            </a:pPr>
-            <a:r>
-              <a:rPr lang="en-US" sz="900" b="1" dirty="0">
-                <a:solidFill>
-                  <a:srgbClr val="9D174D"/>
-                </a:solidFill>
-                <a:latin typeface="Trebuchet MS" pitchFamily="34" charset="0"/>
-                <a:ea typeface="Trebuchet MS" pitchFamily="34" charset="-122"/>
-                <a:cs typeface="Trebuchet MS" pitchFamily="34" charset="-120"/>
-              </a:rPr>
-              <a:t>iew</a:t>
-            </a:r>
-            <a:endParaRPr lang="en-US" sz="900" dirty="0"/>
-          </a:p>
-        </p:txBody>
-      </p:sp>
-      <p:sp>
-        <p:nvSpPr>
-          <p:cNvPr id="47" name="Text 45"/>
-          <p:cNvSpPr/>
-          <p:nvPr/>
-        </p:nvSpPr>
-        <p:spPr>
-          <a:xfrm>
-            <a:off x="5370141" y="4572000"/>
-            <a:ext cx="685800" cy="219456"/>
-          </a:xfrm>
-          <a:prstGeom prst="rect">
-            <a:avLst/>
-          </a:prstGeom>
-          <a:noFill/>
-          <a:ln/>
-        </p:spPr>
-        <p:txBody>
-          <a:bodyPr wrap="square" lIns="0" tIns="0" rIns="0" bIns="0" rtlCol="0" anchor="t"/>
-          <a:lstStyle/>
-          <a:p>
-            <a:pPr algn="ctr" indent="0" marL="0">
-              <a:buNone/>
-            </a:pPr>
-            <a:r>
-              <a:rPr lang="en-US" sz="750" i="1" dirty="0">
-                <a:solidFill>
-                  <a:srgbClr val="94A3B8"/>
-                </a:solidFill>
-                <a:latin typeface="Calibri" pitchFamily="34" charset="0"/>
-                <a:ea typeface="Calibri" pitchFamily="34" charset="-122"/>
-                <a:cs typeface="Calibri" pitchFamily="34" charset="-120"/>
-              </a:rPr>
-              <a:t>/yoo/</a:t>
-            </a:r>
-            <a:endParaRPr lang="en-US" sz="750" dirty="0"/>
-          </a:p>
-        </p:txBody>
-      </p:sp>
-      <p:sp>
-        <p:nvSpPr>
-          <p:cNvPr id="48" name="Shape 46"/>
-          <p:cNvSpPr/>
-          <p:nvPr/>
-        </p:nvSpPr>
-        <p:spPr>
-          <a:xfrm>
-            <a:off x="6408638" y="4169664"/>
-            <a:ext cx="685800" cy="384048"/>
-          </a:xfrm>
-          <a:prstGeom prst="rect">
-            <a:avLst>
-              <a:gd name="adj" fmla="val 9524"/>
-            </a:avLst>
-          </a:prstGeom>
-          <a:solidFill>
-            <a:srgbClr val="FFFFFF"/>
-          </a:solidFill>
-          <a:ln w="12700">
-            <a:solidFill>
-              <a:srgbClr val="DB2777"/>
-            </a:solidFill>
-            <a:prstDash val="solid"/>
-          </a:ln>
-        </p:spPr>
-      </p:sp>
-      <p:sp>
-        <p:nvSpPr>
-          <p:cNvPr id="49" name="Text 47"/>
-          <p:cNvSpPr/>
-          <p:nvPr/>
-        </p:nvSpPr>
-        <p:spPr>
-          <a:xfrm>
-            <a:off x="6408638" y="4169664"/>
-            <a:ext cx="685800" cy="384048"/>
-          </a:xfrm>
-          <a:prstGeom prst="rect">
-            <a:avLst/>
-          </a:prstGeom>
-          <a:noFill/>
-          <a:ln/>
-        </p:spPr>
-        <p:txBody>
-          <a:bodyPr wrap="square" lIns="0" tIns="0" rIns="0" bIns="0" rtlCol="0" anchor="ctr"/>
-          <a:lstStyle/>
-          <a:p>
-            <a:pPr algn="ctr" indent="0" marL="0">
-              <a:buNone/>
-            </a:pPr>
-            <a:r>
-              <a:rPr lang="en-US" sz="900" b="1" dirty="0">
-                <a:solidFill>
-                  <a:srgbClr val="9D174D"/>
-                </a:solidFill>
-                <a:latin typeface="Trebuchet MS" pitchFamily="34" charset="0"/>
-                <a:ea typeface="Trebuchet MS" pitchFamily="34" charset="-122"/>
-                <a:cs typeface="Trebuchet MS" pitchFamily="34" charset="-120"/>
-              </a:rPr>
-              <a:t>i</a:t>
-            </a:r>
-            <a:endParaRPr lang="en-US" sz="900" dirty="0"/>
-          </a:p>
-        </p:txBody>
-      </p:sp>
-      <p:sp>
-        <p:nvSpPr>
-          <p:cNvPr id="50" name="Shape 48"/>
-          <p:cNvSpPr/>
-          <p:nvPr/>
-        </p:nvSpPr>
-        <p:spPr>
-          <a:xfrm>
-            <a:off x="7447135" y="4169664"/>
-            <a:ext cx="685800" cy="384048"/>
-          </a:xfrm>
-          <a:prstGeom prst="rect">
-            <a:avLst>
-              <a:gd name="adj" fmla="val 9524"/>
-            </a:avLst>
-          </a:prstGeom>
-          <a:solidFill>
-            <a:srgbClr val="FFFFFF"/>
-          </a:solidFill>
-          <a:ln w="12700">
-            <a:solidFill>
-              <a:srgbClr val="DB2777"/>
-            </a:solidFill>
-            <a:prstDash val="solid"/>
-          </a:ln>
-        </p:spPr>
-      </p:sp>
-      <p:sp>
-        <p:nvSpPr>
-          <p:cNvPr id="51" name="Text 49"/>
-          <p:cNvSpPr/>
-          <p:nvPr/>
-        </p:nvSpPr>
-        <p:spPr>
-          <a:xfrm>
-            <a:off x="7447135" y="4169664"/>
-            <a:ext cx="685800" cy="384048"/>
-          </a:xfrm>
-          <a:prstGeom prst="rect">
-            <a:avLst/>
-          </a:prstGeom>
-          <a:noFill/>
-          <a:ln/>
-        </p:spPr>
-        <p:txBody>
-          <a:bodyPr wrap="square" lIns="0" tIns="0" rIns="0" bIns="0" rtlCol="0" anchor="ctr"/>
-          <a:lstStyle/>
-          <a:p>
-            <a:pPr algn="ctr" indent="0" marL="0">
-              <a:buNone/>
-            </a:pPr>
-            <a:r>
-              <a:rPr lang="en-US" sz="900" b="1" dirty="0">
-                <a:solidFill>
-                  <a:srgbClr val="9D174D"/>
-                </a:solidFill>
-                <a:latin typeface="Trebuchet MS" pitchFamily="34" charset="0"/>
-                <a:ea typeface="Trebuchet MS" pitchFamily="34" charset="-122"/>
-                <a:cs typeface="Trebuchet MS" pitchFamily="34" charset="-120"/>
-              </a:rPr>
-              <a:t>ng</a:t>
+              <a:t>d</a:t>
             </a:r>
             <a:endParaRPr lang="en-US" sz="900" dirty="0"/>
           </a:p>
@@ -23203,7 +22459,7 @@
                 <a:ea typeface="Trebuchet MS" pitchFamily="34" charset="-122"/>
                 <a:cs typeface="Trebuchet MS" pitchFamily="34" charset="-120"/>
               </a:rPr>
-              <a:t>rewrite</a:t>
+              <a:t>rethink</a:t>
             </a:r>
             <a:endParaRPr lang="en-US" sz="2800" dirty="0"/>
           </a:p>
@@ -24030,7 +23286,7 @@
                 <a:ea typeface="Trebuchet MS" pitchFamily="34" charset="-122"/>
                 <a:cs typeface="Trebuchet MS" pitchFamily="34" charset="-120"/>
               </a:rPr>
-              <a:t>rewrite</a:t>
+              <a:t>rethink</a:t>
             </a:r>
             <a:endParaRPr lang="en-US" sz="2800" dirty="0"/>
           </a:p>
@@ -24281,7 +23537,7 @@
                 <a:ea typeface="Trebuchet MS" pitchFamily="34" charset="-122"/>
                 <a:cs typeface="Trebuchet MS" pitchFamily="34" charset="-120"/>
               </a:rPr>
-              <a:t>write</a:t>
+              <a:t>think</a:t>
             </a:r>
             <a:endParaRPr lang="en-US" sz="1300" dirty="0"/>
           </a:p>
@@ -24320,7 +23576,7 @@
                 <a:ea typeface="Calibri" pitchFamily="34" charset="-122"/>
                 <a:cs typeface="Calibri" pitchFamily="34" charset="-120"/>
               </a:rPr>
-              <a:t>to form words on paper</a:t>
+              <a:t>to use your mind</a:t>
             </a:r>
             <a:endParaRPr lang="en-US" sz="850" dirty="0"/>
           </a:p>
@@ -25734,7 +24990,7 @@
                 <a:ea typeface="Trebuchet MS" pitchFamily="34" charset="-122"/>
                 <a:cs typeface="Trebuchet MS" pitchFamily="34" charset="-120"/>
               </a:rPr>
-              <a:t>rewrite</a:t>
+              <a:t>rethink</a:t>
             </a:r>
             <a:endParaRPr lang="en-US" sz="2800" dirty="0"/>
           </a:p>
@@ -25985,7 +25241,7 @@
                 <a:ea typeface="Trebuchet MS" pitchFamily="34" charset="-122"/>
                 <a:cs typeface="Trebuchet MS" pitchFamily="34" charset="-120"/>
               </a:rPr>
-              <a:t>write</a:t>
+              <a:t>think</a:t>
             </a:r>
             <a:endParaRPr lang="en-US" sz="1300" dirty="0"/>
           </a:p>
@@ -26024,7 +25280,7 @@
                 <a:ea typeface="Calibri" pitchFamily="34" charset="-122"/>
                 <a:cs typeface="Calibri" pitchFamily="34" charset="-120"/>
               </a:rPr>
-              <a:t>to form words on paper</a:t>
+              <a:t>to use your mind</a:t>
             </a:r>
             <a:endParaRPr lang="en-US" sz="850" dirty="0"/>
           </a:p>
@@ -26288,7 +25544,7 @@
                 <a:ea typeface="Trebuchet MS" pitchFamily="34" charset="-122"/>
                 <a:cs typeface="Trebuchet MS" pitchFamily="34" charset="-120"/>
               </a:rPr>
-              <a:t>write</a:t>
+              <a:t>think</a:t>
             </a:r>
             <a:endParaRPr lang="en-US" sz="1400" dirty="0"/>
           </a:p>
@@ -26851,7 +26107,7 @@
                 <a:ea typeface="Trebuchet MS" pitchFamily="34" charset="-122"/>
                 <a:cs typeface="Trebuchet MS" pitchFamily="34" charset="-120"/>
               </a:rPr>
-              <a:t>rewrite</a:t>
+              <a:t>rethink</a:t>
             </a:r>
             <a:endParaRPr lang="en-US" sz="2800" dirty="0"/>
           </a:p>
@@ -27102,7 +26358,7 @@
                 <a:ea typeface="Trebuchet MS" pitchFamily="34" charset="-122"/>
                 <a:cs typeface="Trebuchet MS" pitchFamily="34" charset="-120"/>
               </a:rPr>
-              <a:t>write</a:t>
+              <a:t>think</a:t>
             </a:r>
             <a:endParaRPr lang="en-US" sz="1300" dirty="0"/>
           </a:p>
@@ -27141,7 +26397,7 @@
                 <a:ea typeface="Calibri" pitchFamily="34" charset="-122"/>
                 <a:cs typeface="Calibri" pitchFamily="34" charset="-120"/>
               </a:rPr>
-              <a:t>to form words on paper</a:t>
+              <a:t>to use your mind</a:t>
             </a:r>
             <a:endParaRPr lang="en-US" sz="850" dirty="0"/>
           </a:p>
@@ -27405,7 +26661,7 @@
                 <a:ea typeface="Trebuchet MS" pitchFamily="34" charset="-122"/>
                 <a:cs typeface="Trebuchet MS" pitchFamily="34" charset="-120"/>
               </a:rPr>
-              <a:t>write</a:t>
+              <a:t>think</a:t>
             </a:r>
             <a:endParaRPr lang="en-US" sz="1400" dirty="0"/>
           </a:p>
@@ -27486,11 +26742,11 @@
         <p:spPr>
           <a:xfrm>
             <a:off x="1874520" y="4096512"/>
-            <a:ext cx="6903720" cy="804672"/>
+            <a:ext cx="6903720" cy="658368"/>
           </a:xfrm>
           <a:prstGeom prst="rect">
             <a:avLst>
-              <a:gd name="adj" fmla="val 6818"/>
+              <a:gd name="adj" fmla="val 8333"/>
             </a:avLst>
           </a:prstGeom>
           <a:solidFill>
@@ -27512,12 +26768,12 @@
         </p:nvSpPr>
         <p:spPr>
           <a:xfrm>
-            <a:off x="2427732" y="4169664"/>
-            <a:ext cx="685800" cy="384048"/>
+            <a:off x="2254649" y="4169664"/>
+            <a:ext cx="685800" cy="475488"/>
           </a:xfrm>
           <a:prstGeom prst="rect">
             <a:avLst>
-              <a:gd name="adj" fmla="val 9524"/>
+              <a:gd name="adj" fmla="val 7692"/>
             </a:avLst>
           </a:prstGeom>
           <a:solidFill>
@@ -27539,8 +26795,8 @@
         </p:nvSpPr>
         <p:spPr>
           <a:xfrm>
-            <a:off x="2427732" y="4169664"/>
-            <a:ext cx="685800" cy="384048"/>
+            <a:off x="2254649" y="4169664"/>
+            <a:ext cx="685800" cy="475488"/>
           </a:xfrm>
           <a:prstGeom prst="rect">
             <a:avLst/>
@@ -27578,12 +26834,12 @@
         </p:nvSpPr>
         <p:spPr>
           <a:xfrm>
-            <a:off x="3639312" y="4169664"/>
-            <a:ext cx="685800" cy="384048"/>
+            <a:off x="3293146" y="4169664"/>
+            <a:ext cx="685800" cy="475488"/>
           </a:xfrm>
           <a:prstGeom prst="rect">
             <a:avLst>
-              <a:gd name="adj" fmla="val 9524"/>
+              <a:gd name="adj" fmla="val 7692"/>
             </a:avLst>
           </a:prstGeom>
           <a:solidFill>
@@ -27605,8 +26861,8 @@
         </p:nvSpPr>
         <p:spPr>
           <a:xfrm>
-            <a:off x="3639312" y="4169664"/>
-            <a:ext cx="685800" cy="384048"/>
+            <a:off x="3293146" y="4169664"/>
+            <a:ext cx="685800" cy="475488"/>
           </a:xfrm>
           <a:prstGeom prst="rect">
             <a:avLst/>
@@ -27644,12 +26900,12 @@
         </p:nvSpPr>
         <p:spPr>
           <a:xfrm>
-            <a:off x="4850892" y="4169664"/>
-            <a:ext cx="685800" cy="384048"/>
+            <a:off x="4331643" y="4169664"/>
+            <a:ext cx="685800" cy="475488"/>
           </a:xfrm>
           <a:prstGeom prst="rect">
             <a:avLst>
-              <a:gd name="adj" fmla="val 9524"/>
+              <a:gd name="adj" fmla="val 7692"/>
             </a:avLst>
           </a:prstGeom>
           <a:solidFill>
@@ -27671,8 +26927,8 @@
         </p:nvSpPr>
         <p:spPr>
           <a:xfrm>
-            <a:off x="4850892" y="4169664"/>
-            <a:ext cx="685800" cy="384048"/>
+            <a:off x="4331643" y="4169664"/>
+            <a:ext cx="685800" cy="475488"/>
           </a:xfrm>
           <a:prstGeom prst="rect">
             <a:avLst/>
@@ -27696,7 +26952,7 @@
                 <a:ea typeface="Trebuchet MS" pitchFamily="34" charset="-122"/>
                 <a:cs typeface="Trebuchet MS" pitchFamily="34" charset="-120"/>
               </a:rPr>
-              <a:t>wr</a:t>
+              <a:t>th</a:t>
             </a:r>
             <a:endParaRPr lang="en-US" sz="900" dirty="0"/>
           </a:p>
@@ -27704,57 +26960,18 @@
       </p:sp>
       <p:sp>
         <p:nvSpPr>
-          <p:cNvPr id="39" name="Text 37"/>
-          <p:cNvSpPr/>
-          <p:nvPr/>
-        </p:nvSpPr>
-        <p:spPr>
-          <a:xfrm>
-            <a:off x="4850892" y="4572000"/>
-            <a:ext cx="685800" cy="219456"/>
-          </a:xfrm>
-          <a:prstGeom prst="rect">
-            <a:avLst/>
-          </a:prstGeom>
-          <a:noFill/>
-          <a:ln/>
-        </p:spPr>
-        <p:txBody>
-          <a:bodyPr wrap="square" lIns="0" tIns="0" rIns="0" bIns="0" rtlCol="0" anchor="t"/>
-          <a:lstStyle/>
-          <a:p>
-            <a:pPr algn="ctr" indent="0" marL="0">
-              <a:buNone/>
-            </a:pPr>
-            <a:r>
-              <a:rPr lang="en-US" sz="750" i="1" dirty="0">
-                <a:solidFill>
-                  <a:srgbClr val="94A3B8"/>
-                </a:solidFill>
-                <a:latin typeface="Calibri" pitchFamily="34" charset="0"/>
-                <a:ea typeface="Calibri" pitchFamily="34" charset="-122"/>
-                <a:cs typeface="Calibri" pitchFamily="34" charset="-120"/>
-              </a:rPr>
-              <a:t>/r/</a:t>
-            </a:r>
-            <a:endParaRPr lang="en-US" sz="750" dirty="0"/>
-          </a:p>
-        </p:txBody>
-      </p:sp>
-      <p:sp>
-        <p:nvSpPr>
-          <p:cNvPr id="40" name="Shape 38"/>
-          <p:cNvSpPr/>
-          <p:nvPr/>
-        </p:nvSpPr>
-        <p:spPr>
-          <a:xfrm>
-            <a:off x="6062472" y="4169664"/>
-            <a:ext cx="685800" cy="384048"/>
+          <p:cNvPr id="39" name="Shape 37"/>
+          <p:cNvSpPr/>
+          <p:nvPr/>
+        </p:nvSpPr>
+        <p:spPr>
+          <a:xfrm>
+            <a:off x="5370141" y="4169664"/>
+            <a:ext cx="685800" cy="475488"/>
           </a:xfrm>
           <a:prstGeom prst="rect">
             <a:avLst>
-              <a:gd name="adj" fmla="val 9524"/>
+              <a:gd name="adj" fmla="val 7692"/>
             </a:avLst>
           </a:prstGeom>
           <a:solidFill>
@@ -27770,14 +26987,14 @@
       </p:sp>
       <p:sp>
         <p:nvSpPr>
-          <p:cNvPr id="41" name="Text 39"/>
-          <p:cNvSpPr/>
-          <p:nvPr/>
-        </p:nvSpPr>
-        <p:spPr>
-          <a:xfrm>
-            <a:off x="6062472" y="4169664"/>
-            <a:ext cx="685800" cy="384048"/>
+          <p:cNvPr id="40" name="Text 38"/>
+          <p:cNvSpPr/>
+          <p:nvPr/>
+        </p:nvSpPr>
+        <p:spPr>
+          <a:xfrm>
+            <a:off x="5370141" y="4169664"/>
+            <a:ext cx="685800" cy="475488"/>
           </a:xfrm>
           <a:prstGeom prst="rect">
             <a:avLst/>
@@ -27809,18 +27026,18 @@
       </p:sp>
       <p:sp>
         <p:nvSpPr>
-          <p:cNvPr id="42" name="Shape 40"/>
-          <p:cNvSpPr/>
-          <p:nvPr/>
-        </p:nvSpPr>
-        <p:spPr>
-          <a:xfrm>
-            <a:off x="7274052" y="4169664"/>
-            <a:ext cx="685800" cy="384048"/>
+          <p:cNvPr id="41" name="Shape 39"/>
+          <p:cNvSpPr/>
+          <p:nvPr/>
+        </p:nvSpPr>
+        <p:spPr>
+          <a:xfrm>
+            <a:off x="6408638" y="4169664"/>
+            <a:ext cx="685800" cy="475488"/>
           </a:xfrm>
           <a:prstGeom prst="rect">
             <a:avLst>
-              <a:gd name="adj" fmla="val 9524"/>
+              <a:gd name="adj" fmla="val 7692"/>
             </a:avLst>
           </a:prstGeom>
           <a:solidFill>
@@ -27836,14 +27053,14 @@
       </p:sp>
       <p:sp>
         <p:nvSpPr>
-          <p:cNvPr id="43" name="Text 41"/>
-          <p:cNvSpPr/>
-          <p:nvPr/>
-        </p:nvSpPr>
-        <p:spPr>
-          <a:xfrm>
-            <a:off x="7274052" y="4169664"/>
-            <a:ext cx="685800" cy="384048"/>
+          <p:cNvPr id="42" name="Text 40"/>
+          <p:cNvSpPr/>
+          <p:nvPr/>
+        </p:nvSpPr>
+        <p:spPr>
+          <a:xfrm>
+            <a:off x="6408638" y="4169664"/>
+            <a:ext cx="685800" cy="475488"/>
           </a:xfrm>
           <a:prstGeom prst="rect">
             <a:avLst/>
@@ -27867,7 +27084,7 @@
                 <a:ea typeface="Trebuchet MS" pitchFamily="34" charset="-122"/>
                 <a:cs typeface="Trebuchet MS" pitchFamily="34" charset="-120"/>
               </a:rPr>
-              <a:t>te</a:t>
+              <a:t>n</a:t>
             </a:r>
             <a:endParaRPr lang="en-US" sz="900" dirty="0"/>
           </a:p>
@@ -27875,40 +27092,67 @@
       </p:sp>
       <p:sp>
         <p:nvSpPr>
+          <p:cNvPr id="43" name="Shape 41"/>
+          <p:cNvSpPr/>
+          <p:nvPr/>
+        </p:nvSpPr>
+        <p:spPr>
+          <a:xfrm>
+            <a:off x="7447135" y="4169664"/>
+            <a:ext cx="685800" cy="475488"/>
+          </a:xfrm>
+          <a:prstGeom prst="rect">
+            <a:avLst>
+              <a:gd name="adj" fmla="val 7692"/>
+            </a:avLst>
+          </a:prstGeom>
+          <a:solidFill>
+            <a:srgbClr val="FFFFFF"/>
+          </a:solidFill>
+          <a:ln w="12700">
+            <a:solidFill>
+              <a:srgbClr val="DB2777"/>
+            </a:solidFill>
+            <a:prstDash val="solid"/>
+          </a:ln>
+        </p:spPr>
+      </p:sp>
+      <p:sp>
+        <p:nvSpPr>
           <p:cNvPr id="44" name="Text 42"/>
           <p:cNvSpPr/>
           <p:nvPr/>
         </p:nvSpPr>
         <p:spPr>
           <a:xfrm>
-            <a:off x="7274052" y="4572000"/>
-            <a:ext cx="685800" cy="219456"/>
-          </a:xfrm>
-          <a:prstGeom prst="rect">
-            <a:avLst/>
-          </a:prstGeom>
-          <a:noFill/>
-          <a:ln/>
-        </p:spPr>
-        <p:txBody>
-          <a:bodyPr wrap="square" lIns="0" tIns="0" rIns="0" bIns="0" rtlCol="0" anchor="t"/>
-          <a:lstStyle/>
-          <a:p>
-            <a:pPr algn="ctr" indent="0" marL="0">
-              <a:buNone/>
-            </a:pPr>
-            <a:r>
-              <a:rPr lang="en-US" sz="750" i="1" dirty="0">
-                <a:solidFill>
-                  <a:srgbClr val="94A3B8"/>
-                </a:solidFill>
-                <a:latin typeface="Calibri" pitchFamily="34" charset="0"/>
-                <a:ea typeface="Calibri" pitchFamily="34" charset="-122"/>
-                <a:cs typeface="Calibri" pitchFamily="34" charset="-120"/>
-              </a:rPr>
-              <a:t>/t/</a:t>
-            </a:r>
-            <a:endParaRPr lang="en-US" sz="750" dirty="0"/>
+            <a:off x="7447135" y="4169664"/>
+            <a:ext cx="685800" cy="475488"/>
+          </a:xfrm>
+          <a:prstGeom prst="rect">
+            <a:avLst/>
+          </a:prstGeom>
+          <a:noFill/>
+          <a:ln/>
+        </p:spPr>
+        <p:txBody>
+          <a:bodyPr wrap="square" lIns="0" tIns="0" rIns="0" bIns="0" rtlCol="0" anchor="ctr"/>
+          <a:lstStyle/>
+          <a:p>
+            <a:pPr algn="ctr" indent="0" marL="0">
+              <a:buNone/>
+            </a:pPr>
+            <a:r>
+              <a:rPr lang="en-US" sz="900" b="1" dirty="0">
+                <a:solidFill>
+                  <a:srgbClr val="9D174D"/>
+                </a:solidFill>
+                <a:latin typeface="Trebuchet MS" pitchFamily="34" charset="0"/>
+                <a:ea typeface="Trebuchet MS" pitchFamily="34" charset="-122"/>
+                <a:cs typeface="Trebuchet MS" pitchFamily="34" charset="-120"/>
+              </a:rPr>
+              <a:t>k</a:t>
+            </a:r>
+            <a:endParaRPr lang="en-US" sz="900" dirty="0"/>
           </a:p>
         </p:txBody>
       </p:sp>
@@ -28337,7 +27581,7 @@
                 <a:ea typeface="Trebuchet MS" pitchFamily="34" charset="-122"/>
                 <a:cs typeface="Trebuchet MS" pitchFamily="34" charset="-120"/>
               </a:rPr>
-              <a:t>reorder</a:t>
+              <a:t>revisit</a:t>
             </a:r>
             <a:endParaRPr lang="en-US" sz="2800" dirty="0"/>
           </a:p>
@@ -29164,7 +28408,7 @@
                 <a:ea typeface="Trebuchet MS" pitchFamily="34" charset="-122"/>
                 <a:cs typeface="Trebuchet MS" pitchFamily="34" charset="-120"/>
               </a:rPr>
-              <a:t>reorder</a:t>
+              <a:t>revisit</a:t>
             </a:r>
             <a:endParaRPr lang="en-US" sz="2800" dirty="0"/>
           </a:p>
@@ -29342,7 +28586,7 @@
                 <a:ea typeface="Calibri" pitchFamily="34" charset="-122"/>
                 <a:cs typeface="Calibri" pitchFamily="34" charset="-120"/>
               </a:rPr>
-              <a:t>again</a:t>
+              <a:t>again, back</a:t>
             </a:r>
             <a:endParaRPr lang="en-US" sz="850" dirty="0"/>
           </a:p>
@@ -29415,7 +28659,7 @@
                 <a:ea typeface="Trebuchet MS" pitchFamily="34" charset="-122"/>
                 <a:cs typeface="Trebuchet MS" pitchFamily="34" charset="-120"/>
               </a:rPr>
-              <a:t>order</a:t>
+              <a:t>visit</a:t>
             </a:r>
             <a:endParaRPr lang="en-US" sz="1300" dirty="0"/>
           </a:p>
@@ -29454,7 +28698,7 @@
                 <a:ea typeface="Calibri" pitchFamily="34" charset="-122"/>
                 <a:cs typeface="Calibri" pitchFamily="34" charset="-120"/>
               </a:rPr>
-              <a:t>to arrange or sequence</a:t>
+              <a:t>to go and see someone or somewhere</a:t>
             </a:r>
             <a:endParaRPr lang="en-US" sz="850" dirty="0"/>
           </a:p>
@@ -30149,7 +29393,7 @@
                 <a:ea typeface="Trebuchet MS" pitchFamily="34" charset="-122"/>
                 <a:cs typeface="Trebuchet MS" pitchFamily="34" charset="-120"/>
               </a:rPr>
-              <a:t>reorder</a:t>
+              <a:t>revisit</a:t>
             </a:r>
             <a:endParaRPr lang="en-US" sz="2800" dirty="0"/>
           </a:p>
@@ -30327,7 +29571,7 @@
                 <a:ea typeface="Calibri" pitchFamily="34" charset="-122"/>
                 <a:cs typeface="Calibri" pitchFamily="34" charset="-120"/>
               </a:rPr>
-              <a:t>again</a:t>
+              <a:t>again, back</a:t>
             </a:r>
             <a:endParaRPr lang="en-US" sz="850" dirty="0"/>
           </a:p>
@@ -30400,7 +29644,7 @@
                 <a:ea typeface="Trebuchet MS" pitchFamily="34" charset="-122"/>
                 <a:cs typeface="Trebuchet MS" pitchFamily="34" charset="-120"/>
               </a:rPr>
-              <a:t>order</a:t>
+              <a:t>visit</a:t>
             </a:r>
             <a:endParaRPr lang="en-US" sz="1300" dirty="0"/>
           </a:p>
@@ -30439,7 +29683,7 @@
                 <a:ea typeface="Calibri" pitchFamily="34" charset="-122"/>
                 <a:cs typeface="Calibri" pitchFamily="34" charset="-120"/>
               </a:rPr>
-              <a:t>to arrange or sequence</a:t>
+              <a:t>to go and see someone or somewhere</a:t>
             </a:r>
             <a:endParaRPr lang="en-US" sz="850" dirty="0"/>
           </a:p>
@@ -30703,7 +29947,7 @@
                 <a:ea typeface="Trebuchet MS" pitchFamily="34" charset="-122"/>
                 <a:cs typeface="Trebuchet MS" pitchFamily="34" charset="-120"/>
               </a:rPr>
-              <a:t>or</a:t>
+              <a:t>vis</a:t>
             </a:r>
             <a:endParaRPr lang="en-US" sz="1400" dirty="0"/>
           </a:p>
@@ -30808,7 +30052,7 @@
                 <a:ea typeface="Trebuchet MS" pitchFamily="34" charset="-122"/>
                 <a:cs typeface="Trebuchet MS" pitchFamily="34" charset="-120"/>
               </a:rPr>
-              <a:t>der</a:t>
+              <a:t>it</a:t>
             </a:r>
             <a:endParaRPr lang="en-US" sz="1400" dirty="0"/>
           </a:p>
@@ -31371,7 +30615,7 @@
                 <a:ea typeface="Trebuchet MS" pitchFamily="34" charset="-122"/>
                 <a:cs typeface="Trebuchet MS" pitchFamily="34" charset="-120"/>
               </a:rPr>
-              <a:t>reorder</a:t>
+              <a:t>revisit</a:t>
             </a:r>
             <a:endParaRPr lang="en-US" sz="2800" dirty="0"/>
           </a:p>
@@ -31549,7 +30793,7 @@
                 <a:ea typeface="Calibri" pitchFamily="34" charset="-122"/>
                 <a:cs typeface="Calibri" pitchFamily="34" charset="-120"/>
               </a:rPr>
-              <a:t>again</a:t>
+              <a:t>again, back</a:t>
             </a:r>
             <a:endParaRPr lang="en-US" sz="850" dirty="0"/>
           </a:p>
@@ -31622,7 +30866,7 @@
                 <a:ea typeface="Trebuchet MS" pitchFamily="34" charset="-122"/>
                 <a:cs typeface="Trebuchet MS" pitchFamily="34" charset="-120"/>
               </a:rPr>
-              <a:t>order</a:t>
+              <a:t>visit</a:t>
             </a:r>
             <a:endParaRPr lang="en-US" sz="1300" dirty="0"/>
           </a:p>
@@ -31661,7 +30905,7 @@
                 <a:ea typeface="Calibri" pitchFamily="34" charset="-122"/>
                 <a:cs typeface="Calibri" pitchFamily="34" charset="-120"/>
               </a:rPr>
-              <a:t>to arrange or sequence</a:t>
+              <a:t>to go and see someone or somewhere</a:t>
             </a:r>
             <a:endParaRPr lang="en-US" sz="850" dirty="0"/>
           </a:p>
@@ -31925,7 +31169,7 @@
                 <a:ea typeface="Trebuchet MS" pitchFamily="34" charset="-122"/>
                 <a:cs typeface="Trebuchet MS" pitchFamily="34" charset="-120"/>
               </a:rPr>
-              <a:t>or</a:t>
+              <a:t>vis</a:t>
             </a:r>
             <a:endParaRPr lang="en-US" sz="1400" dirty="0"/>
           </a:p>
@@ -32030,7 +31274,7 @@
                 <a:ea typeface="Trebuchet MS" pitchFamily="34" charset="-122"/>
                 <a:cs typeface="Trebuchet MS" pitchFamily="34" charset="-120"/>
               </a:rPr>
-              <a:t>der</a:t>
+              <a:t>it</a:t>
             </a:r>
             <a:endParaRPr lang="en-US" sz="1400" dirty="0"/>
           </a:p>
@@ -32137,7 +31381,7 @@
         </p:nvSpPr>
         <p:spPr>
           <a:xfrm>
-            <a:off x="2427732" y="4169664"/>
+            <a:off x="2124837" y="4169664"/>
             <a:ext cx="685800" cy="475488"/>
           </a:xfrm>
           <a:prstGeom prst="rect">
@@ -32164,7 +31408,7 @@
         </p:nvSpPr>
         <p:spPr>
           <a:xfrm>
-            <a:off x="2427732" y="4169664"/>
+            <a:off x="2124837" y="4169664"/>
             <a:ext cx="685800" cy="475488"/>
           </a:xfrm>
           <a:prstGeom prst="rect">
@@ -32203,7 +31447,7 @@
         </p:nvSpPr>
         <p:spPr>
           <a:xfrm>
-            <a:off x="3639312" y="4169664"/>
+            <a:off x="3033522" y="4169664"/>
             <a:ext cx="685800" cy="475488"/>
           </a:xfrm>
           <a:prstGeom prst="rect">
@@ -32230,7 +31474,7 @@
         </p:nvSpPr>
         <p:spPr>
           <a:xfrm>
-            <a:off x="3639312" y="4169664"/>
+            <a:off x="3033522" y="4169664"/>
             <a:ext cx="685800" cy="475488"/>
           </a:xfrm>
           <a:prstGeom prst="rect">
@@ -32269,7 +31513,7 @@
         </p:nvSpPr>
         <p:spPr>
           <a:xfrm>
-            <a:off x="4850892" y="4169664"/>
+            <a:off x="3942207" y="4169664"/>
             <a:ext cx="685800" cy="475488"/>
           </a:xfrm>
           <a:prstGeom prst="rect">
@@ -32296,7 +31540,7 @@
         </p:nvSpPr>
         <p:spPr>
           <a:xfrm>
-            <a:off x="4850892" y="4169664"/>
+            <a:off x="3942207" y="4169664"/>
             <a:ext cx="685800" cy="475488"/>
           </a:xfrm>
           <a:prstGeom prst="rect">
@@ -32321,7 +31565,7 @@
                 <a:ea typeface="Trebuchet MS" pitchFamily="34" charset="-122"/>
                 <a:cs typeface="Trebuchet MS" pitchFamily="34" charset="-120"/>
               </a:rPr>
-              <a:t>or</a:t>
+              <a:t>v</a:t>
             </a:r>
             <a:endParaRPr lang="en-US" sz="900" dirty="0"/>
           </a:p>
@@ -32335,7 +31579,7 @@
         </p:nvSpPr>
         <p:spPr>
           <a:xfrm>
-            <a:off x="6062472" y="4169664"/>
+            <a:off x="4850892" y="4169664"/>
             <a:ext cx="685800" cy="475488"/>
           </a:xfrm>
           <a:prstGeom prst="rect">
@@ -32362,7 +31606,7 @@
         </p:nvSpPr>
         <p:spPr>
           <a:xfrm>
-            <a:off x="6062472" y="4169664"/>
+            <a:off x="4850892" y="4169664"/>
             <a:ext cx="685800" cy="475488"/>
           </a:xfrm>
           <a:prstGeom prst="rect">
@@ -32387,7 +31631,7 @@
                 <a:ea typeface="Trebuchet MS" pitchFamily="34" charset="-122"/>
                 <a:cs typeface="Trebuchet MS" pitchFamily="34" charset="-120"/>
               </a:rPr>
-              <a:t>d</a:t>
+              <a:t>i</a:t>
             </a:r>
             <a:endParaRPr lang="en-US" sz="900" dirty="0"/>
           </a:p>
@@ -32401,7 +31645,7 @@
         </p:nvSpPr>
         <p:spPr>
           <a:xfrm>
-            <a:off x="7274052" y="4169664"/>
+            <a:off x="5759577" y="4169664"/>
             <a:ext cx="685800" cy="475488"/>
           </a:xfrm>
           <a:prstGeom prst="rect">
@@ -32428,7 +31672,7 @@
         </p:nvSpPr>
         <p:spPr>
           <a:xfrm>
-            <a:off x="7274052" y="4169664"/>
+            <a:off x="5759577" y="4169664"/>
             <a:ext cx="685800" cy="475488"/>
           </a:xfrm>
           <a:prstGeom prst="rect">
@@ -32453,7 +31697,139 @@
                 <a:ea typeface="Trebuchet MS" pitchFamily="34" charset="-122"/>
                 <a:cs typeface="Trebuchet MS" pitchFamily="34" charset="-120"/>
               </a:rPr>
-              <a:t>er</a:t>
+              <a:t>s</a:t>
+            </a:r>
+            <a:endParaRPr lang="en-US" sz="900" dirty="0"/>
+          </a:p>
+        </p:txBody>
+      </p:sp>
+      <p:sp>
+        <p:nvSpPr>
+          <p:cNvPr id="46" name="Shape 44"/>
+          <p:cNvSpPr/>
+          <p:nvPr/>
+        </p:nvSpPr>
+        <p:spPr>
+          <a:xfrm>
+            <a:off x="6668262" y="4169664"/>
+            <a:ext cx="685800" cy="475488"/>
+          </a:xfrm>
+          <a:prstGeom prst="rect">
+            <a:avLst>
+              <a:gd name="adj" fmla="val 7692"/>
+            </a:avLst>
+          </a:prstGeom>
+          <a:solidFill>
+            <a:srgbClr val="FFFFFF"/>
+          </a:solidFill>
+          <a:ln w="12700">
+            <a:solidFill>
+              <a:srgbClr val="DB2777"/>
+            </a:solidFill>
+            <a:prstDash val="solid"/>
+          </a:ln>
+        </p:spPr>
+      </p:sp>
+      <p:sp>
+        <p:nvSpPr>
+          <p:cNvPr id="47" name="Text 45"/>
+          <p:cNvSpPr/>
+          <p:nvPr/>
+        </p:nvSpPr>
+        <p:spPr>
+          <a:xfrm>
+            <a:off x="6668262" y="4169664"/>
+            <a:ext cx="685800" cy="475488"/>
+          </a:xfrm>
+          <a:prstGeom prst="rect">
+            <a:avLst/>
+          </a:prstGeom>
+          <a:noFill/>
+          <a:ln/>
+        </p:spPr>
+        <p:txBody>
+          <a:bodyPr wrap="square" lIns="0" tIns="0" rIns="0" bIns="0" rtlCol="0" anchor="ctr"/>
+          <a:lstStyle/>
+          <a:p>
+            <a:pPr algn="ctr" indent="0" marL="0">
+              <a:buNone/>
+            </a:pPr>
+            <a:r>
+              <a:rPr lang="en-US" sz="900" b="1" dirty="0">
+                <a:solidFill>
+                  <a:srgbClr val="9D174D"/>
+                </a:solidFill>
+                <a:latin typeface="Trebuchet MS" pitchFamily="34" charset="0"/>
+                <a:ea typeface="Trebuchet MS" pitchFamily="34" charset="-122"/>
+                <a:cs typeface="Trebuchet MS" pitchFamily="34" charset="-120"/>
+              </a:rPr>
+              <a:t>i</a:t>
+            </a:r>
+            <a:endParaRPr lang="en-US" sz="900" dirty="0"/>
+          </a:p>
+        </p:txBody>
+      </p:sp>
+      <p:sp>
+        <p:nvSpPr>
+          <p:cNvPr id="48" name="Shape 46"/>
+          <p:cNvSpPr/>
+          <p:nvPr/>
+        </p:nvSpPr>
+        <p:spPr>
+          <a:xfrm>
+            <a:off x="7576947" y="4169664"/>
+            <a:ext cx="685800" cy="475488"/>
+          </a:xfrm>
+          <a:prstGeom prst="rect">
+            <a:avLst>
+              <a:gd name="adj" fmla="val 7692"/>
+            </a:avLst>
+          </a:prstGeom>
+          <a:solidFill>
+            <a:srgbClr val="FFFFFF"/>
+          </a:solidFill>
+          <a:ln w="12700">
+            <a:solidFill>
+              <a:srgbClr val="DB2777"/>
+            </a:solidFill>
+            <a:prstDash val="solid"/>
+          </a:ln>
+        </p:spPr>
+      </p:sp>
+      <p:sp>
+        <p:nvSpPr>
+          <p:cNvPr id="49" name="Text 47"/>
+          <p:cNvSpPr/>
+          <p:nvPr/>
+        </p:nvSpPr>
+        <p:spPr>
+          <a:xfrm>
+            <a:off x="7576947" y="4169664"/>
+            <a:ext cx="685800" cy="475488"/>
+          </a:xfrm>
+          <a:prstGeom prst="rect">
+            <a:avLst/>
+          </a:prstGeom>
+          <a:noFill/>
+          <a:ln/>
+        </p:spPr>
+        <p:txBody>
+          <a:bodyPr wrap="square" lIns="0" tIns="0" rIns="0" bIns="0" rtlCol="0" anchor="ctr"/>
+          <a:lstStyle/>
+          <a:p>
+            <a:pPr algn="ctr" indent="0" marL="0">
+              <a:buNone/>
+            </a:pPr>
+            <a:r>
+              <a:rPr lang="en-US" sz="900" b="1" dirty="0">
+                <a:solidFill>
+                  <a:srgbClr val="9D174D"/>
+                </a:solidFill>
+                <a:latin typeface="Trebuchet MS" pitchFamily="34" charset="0"/>
+                <a:ea typeface="Trebuchet MS" pitchFamily="34" charset="-122"/>
+                <a:cs typeface="Trebuchet MS" pitchFamily="34" charset="-120"/>
+              </a:rPr>
+              <a:t>t</a:t>
             </a:r>
             <a:endParaRPr lang="en-US" sz="900" dirty="0"/>
           </a:p>
@@ -35324,7 +34700,7 @@
                 <a:ea typeface="Trebuchet MS" pitchFamily="34" charset="-122"/>
                 <a:cs typeface="Trebuchet MS" pitchFamily="34" charset="-120"/>
               </a:rPr>
-              <a:t>reconnect</a:t>
+              <a:t>revisit</a:t>
             </a:r>
             <a:endParaRPr lang="en-US" sz="1200" dirty="0"/>
           </a:p>
@@ -35390,7 +34766,7 @@
                 <a:ea typeface="Trebuchet MS" pitchFamily="34" charset="-122"/>
                 <a:cs typeface="Trebuchet MS" pitchFamily="34" charset="-120"/>
               </a:rPr>
-              <a:t>review</a:t>
+              <a:t>remind</a:t>
             </a:r>
             <a:endParaRPr lang="en-US" sz="1200" dirty="0"/>
           </a:p>
@@ -35456,7 +34832,7 @@
                 <a:ea typeface="Trebuchet MS" pitchFamily="34" charset="-122"/>
                 <a:cs typeface="Trebuchet MS" pitchFamily="34" charset="-120"/>
               </a:rPr>
-              <a:t>return</a:t>
+              <a:t>replace</a:t>
             </a:r>
             <a:endParaRPr lang="en-US" sz="1200" dirty="0"/>
           </a:p>
@@ -35522,7 +34898,7 @@
                 <a:ea typeface="Trebuchet MS" pitchFamily="34" charset="-122"/>
                 <a:cs typeface="Trebuchet MS" pitchFamily="34" charset="-120"/>
               </a:rPr>
-              <a:t>remind</a:t>
+              <a:t>rethink</a:t>
             </a:r>
             <a:endParaRPr lang="en-US" sz="1200" dirty="0"/>
           </a:p>
@@ -36710,7 +36086,7 @@
                 <a:ea typeface="Calibri" pitchFamily="34" charset="-122"/>
                 <a:cs typeface="Calibri" pitchFamily="34" charset="-120"/>
               </a:rPr>
-              <a:t>1.  The prefix 're-' means again or back.</a:t>
+              <a:t>1.  The word 'repeat' does not contain the prefix 're-'.</a:t>
             </a:r>
             <a:endParaRPr lang="en-US" sz="1300" dirty="0"/>
           </a:p>
@@ -36733,11 +36109,11 @@
             </a:avLst>
           </a:prstGeom>
           <a:solidFill>
-            <a:srgbClr val="DCFCE7"/>
-          </a:solidFill>
-          <a:ln w="12700">
-            <a:solidFill>
-              <a:srgbClr val="16A34A"/>
+            <a:srgbClr val="FEE2E2"/>
+          </a:solidFill>
+          <a:ln w="12700">
+            <a:solidFill>
+              <a:srgbClr val="DC2626"/>
             </a:solidFill>
             <a:prstDash val="solid"/>
           </a:ln>
@@ -36770,13 +36146,13 @@
             <a:r>
               <a:rPr lang="en-US" sz="1100" b="1" dirty="0">
                 <a:solidFill>
-                  <a:srgbClr val="16A34A"/>
+                  <a:srgbClr val="DC2626"/>
                 </a:solidFill>
                 <a:latin typeface="Trebuchet MS" pitchFamily="34" charset="0"/>
                 <a:ea typeface="Trebuchet MS" pitchFamily="34" charset="-122"/>
                 <a:cs typeface="Trebuchet MS" pitchFamily="34" charset="-120"/>
               </a:rPr>
-              <a:t>TRUE</a:t>
+              <a:t>FALSE</a:t>
             </a:r>
             <a:endParaRPr lang="en-US" sz="1100" dirty="0"/>
           </a:p>
@@ -36849,7 +36225,7 @@
                 <a:ea typeface="Calibri" pitchFamily="34" charset="-122"/>
                 <a:cs typeface="Calibri" pitchFamily="34" charset="-120"/>
               </a:rPr>
-              <a:t>2.  The prefix 're-' comes from Greek.</a:t>
+              <a:t>2.  The prefix 're-' means 'before' or 'in front of'.</a:t>
             </a:r>
             <a:endParaRPr lang="en-US" sz="1300" dirty="0"/>
           </a:p>
@@ -36988,7 +36364,7 @@
                 <a:ea typeface="Calibri" pitchFamily="34" charset="-122"/>
                 <a:cs typeface="Calibri" pitchFamily="34" charset="-120"/>
               </a:rPr>
-              <a:t>3.  The word 'rewrite' means to write something again.</a:t>
+              <a:t>3.  The prefix 're-' means 'again' or 'back'.</a:t>
             </a:r>
             <a:endParaRPr lang="en-US" sz="1300" dirty="0"/>
           </a:p>
@@ -37127,7 +36503,7 @@
                 <a:ea typeface="Calibri" pitchFamily="34" charset="-122"/>
                 <a:cs typeface="Calibri" pitchFamily="34" charset="-120"/>
               </a:rPr>
-              <a:t>4.  Adding 're-' to a word always changes its meaning to the opposite.</a:t>
+              <a:t>4.  Adding 're-' to 'build' makes a new word meaning to build again.</a:t>
             </a:r>
             <a:endParaRPr lang="en-US" sz="1300" dirty="0"/>
           </a:p>
@@ -37150,11 +36526,11 @@
             </a:avLst>
           </a:prstGeom>
           <a:solidFill>
-            <a:srgbClr val="FEE2E2"/>
-          </a:solidFill>
-          <a:ln w="12700">
-            <a:solidFill>
-              <a:srgbClr val="DC2626"/>
+            <a:srgbClr val="DCFCE7"/>
+          </a:solidFill>
+          <a:ln w="12700">
+            <a:solidFill>
+              <a:srgbClr val="16A34A"/>
             </a:solidFill>
             <a:prstDash val="solid"/>
           </a:ln>
@@ -37187,13 +36563,13 @@
             <a:r>
               <a:rPr lang="en-US" sz="1100" b="1" dirty="0">
                 <a:solidFill>
-                  <a:srgbClr val="DC2626"/>
+                  <a:srgbClr val="16A34A"/>
                 </a:solidFill>
                 <a:latin typeface="Trebuchet MS" pitchFamily="34" charset="0"/>
                 <a:ea typeface="Trebuchet MS" pitchFamily="34" charset="-122"/>
                 <a:cs typeface="Trebuchet MS" pitchFamily="34" charset="-120"/>
               </a:rPr>
-              <a:t>FALSE</a:t>
+              <a:t>TRUE</a:t>
             </a:r>
             <a:endParaRPr lang="en-US" sz="1100" dirty="0"/>
           </a:p>
@@ -37266,7 +36642,7 @@
                 <a:ea typeface="Calibri" pitchFamily="34" charset="-122"/>
                 <a:cs typeface="Calibri" pitchFamily="34" charset="-120"/>
               </a:rPr>
-              <a:t>5.  The prefix 're-' can be added to the word 'build' to make 'rebuild'.</a:t>
+              <a:t>5.  The prefix 're-' comes from Latin.</a:t>
             </a:r>
             <a:endParaRPr lang="en-US" sz="1300" dirty="0"/>
           </a:p>
@@ -38169,7 +37545,7 @@
                 <a:ea typeface="Trebuchet MS" pitchFamily="34" charset="-122"/>
                 <a:cs typeface="Trebuchet MS" pitchFamily="34" charset="-120"/>
               </a:rPr>
-              <a:t>reconnect</a:t>
+              <a:t>revisit</a:t>
             </a:r>
             <a:endParaRPr lang="en-US" sz="1300" dirty="0"/>
           </a:p>
@@ -38235,7 +37611,7 @@
                 <a:ea typeface="Trebuchet MS" pitchFamily="34" charset="-122"/>
                 <a:cs typeface="Trebuchet MS" pitchFamily="34" charset="-120"/>
               </a:rPr>
-              <a:t>review</a:t>
+              <a:t>remind</a:t>
             </a:r>
             <a:endParaRPr lang="en-US" sz="1300" dirty="0"/>
           </a:p>
@@ -38301,7 +37677,7 @@
                 <a:ea typeface="Trebuchet MS" pitchFamily="34" charset="-122"/>
                 <a:cs typeface="Trebuchet MS" pitchFamily="34" charset="-120"/>
               </a:rPr>
-              <a:t>return</a:t>
+              <a:t>replace</a:t>
             </a:r>
             <a:endParaRPr lang="en-US" sz="1300" dirty="0"/>
           </a:p>
@@ -40545,7 +39921,7 @@
                 <a:ea typeface="Calibri" pitchFamily="34" charset="-122"/>
                 <a:cs typeface="Calibri" pitchFamily="34" charset="-120"/>
               </a:rPr>
-              <a:t>To join or link things together again after they have been separated.</a:t>
+              <a:t>To go back and visit a place or idea again.</a:t>
             </a:r>
             <a:endParaRPr lang="en-US" sz="1200" dirty="0"/>
           </a:p>
@@ -40823,7 +40199,7 @@
                 <a:ea typeface="Calibri" pitchFamily="34" charset="-122"/>
                 <a:cs typeface="Calibri" pitchFamily="34" charset="-120"/>
               </a:rPr>
-              <a:t>To play something again, like a game or a video clip.</a:t>
+              <a:t>To play something again, like watching a video or replaying a game.</a:t>
             </a:r>
             <a:endParaRPr lang="en-US" sz="1200" dirty="0"/>
           </a:p>
@@ -40962,7 +40338,7 @@
                 <a:ea typeface="Calibri" pitchFamily="34" charset="-122"/>
                 <a:cs typeface="Calibri" pitchFamily="34" charset="-120"/>
               </a:rPr>
-              <a:t>To go back to a place or give something back to someone.</a:t>
+              <a:t>To put something back or swap it with something new.</a:t>
             </a:r>
             <a:endParaRPr lang="en-US" sz="1200" dirty="0"/>
           </a:p>
@@ -41035,7 +40411,7 @@
                 <a:ea typeface="Trebuchet MS" pitchFamily="34" charset="-122"/>
                 <a:cs typeface="Trebuchet MS" pitchFamily="34" charset="-120"/>
               </a:rPr>
-              <a:t>reconnect</a:t>
+              <a:t>revisit</a:t>
             </a:r>
             <a:endParaRPr lang="en-US" sz="1200" dirty="0"/>
           </a:p>
@@ -41101,7 +40477,7 @@
                 <a:ea typeface="Calibri" pitchFamily="34" charset="-122"/>
                 <a:cs typeface="Calibri" pitchFamily="34" charset="-120"/>
               </a:rPr>
-              <a:t>To build something again after it has been damaged or knocked down.</a:t>
+              <a:t>To build something again after it has been damaged or destroyed.</a:t>
             </a:r>
             <a:endParaRPr lang="en-US" sz="1200" dirty="0"/>
           </a:p>
@@ -41174,7 +40550,7 @@
                 <a:ea typeface="Trebuchet MS" pitchFamily="34" charset="-122"/>
                 <a:cs typeface="Trebuchet MS" pitchFamily="34" charset="-120"/>
               </a:rPr>
-              <a:t>review</a:t>
+              <a:t>remind</a:t>
             </a:r>
             <a:endParaRPr lang="en-US" sz="1200" dirty="0"/>
           </a:p>
@@ -41240,7 +40616,7 @@
                 <a:ea typeface="Calibri" pitchFamily="34" charset="-122"/>
                 <a:cs typeface="Calibri" pitchFamily="34" charset="-120"/>
               </a:rPr>
-              <a:t>To look at something again carefully to check or improve it.</a:t>
+              <a:t>To help someone remember something they might have forgotten.</a:t>
             </a:r>
             <a:endParaRPr lang="en-US" sz="1200" dirty="0"/>
           </a:p>
@@ -41313,7 +40689,7 @@
                 <a:ea typeface="Trebuchet MS" pitchFamily="34" charset="-122"/>
                 <a:cs typeface="Trebuchet MS" pitchFamily="34" charset="-120"/>
               </a:rPr>
-              <a:t>return</a:t>
+              <a:t>replace</a:t>
             </a:r>
             <a:endParaRPr lang="en-US" sz="1200" dirty="0"/>
           </a:p>
@@ -41874,7 +41250,7 @@
                 <a:ea typeface="Calibri" pitchFamily="34" charset="-122"/>
                 <a:cs typeface="Calibri" pitchFamily="34" charset="-120"/>
               </a:rPr>
-              <a:t>After the storm, the community came together to rebuild the old fence around the school.</a:t>
+              <a:t>We had to rebuild the sandcastle after the wave knocked it down.</a:t>
             </a:r>
             <a:endParaRPr lang="en-US" sz="1500" dirty="0"/>
           </a:p>
@@ -42038,7 +41414,7 @@
                 <a:ea typeface="Calibri" pitchFamily="34" charset="-122"/>
                 <a:cs typeface="Calibri" pitchFamily="34" charset="-120"/>
               </a:rPr>
-              <a:t>The teacher asked Sam to rewrite his paragraph so that his ideas were clearer.</a:t>
+              <a:t>The teacher asked us to rewrite our paragraphs to make them clearer.</a:t>
             </a:r>
             <a:endParaRPr lang="en-US" sz="1500" dirty="0"/>
           </a:p>
@@ -42202,7 +41578,7 @@
                 <a:ea typeface="Calibri" pitchFamily="34" charset="-122"/>
                 <a:cs typeface="Calibri" pitchFamily="34" charset="-120"/>
               </a:rPr>
-              <a:t>We had to replay the video clip because some students missed the beginning.</a:t>
+              <a:t>Mum reminded me to pack my library books before school.</a:t>
             </a:r>
             <a:endParaRPr lang="en-US" sz="1500" dirty="0"/>
           </a:p>
